--- a/Fase 3/Evidencias Grupales/Formato Presentación final.pptx
+++ b/Fase 3/Evidencias Grupales/Formato Presentación final.pptx
@@ -117,6 +117,11 @@
       </a:defRPr>
     </a:lvl9pPr>
   </p:defaultTextStyle>
+  <p:extLst>
+    <p:ext uri="{EFAFB233-063F-42B5-8137-9DF3F51BA10A}">
+      <p15:sldGuideLst xmlns:p15="http://schemas.microsoft.com/office/powerpoint/2012/main"/>
+    </p:ext>
+  </p:extLst>
 </p:presentation>
 </file>
 
@@ -890,7 +895,7 @@
         <a:p>
           <a:r>
             <a:rPr lang="es-MX" dirty="0"/>
-            <a:t>Nombre de estudiante</a:t>
+            <a:t>Benjamín Alejandro Bravo Rivadeneira</a:t>
           </a:r>
           <a:endParaRPr lang="es-CL" dirty="0"/>
         </a:p>
@@ -908,43 +913,6 @@
       </dgm:t>
     </dgm:pt>
     <dgm:pt modelId="{E88D0928-51D4-4670-8963-60ABBB193E13}" type="sibTrans" cxnId="{2AD07198-D472-4B98-B6D5-5A730374E9A2}">
-      <dgm:prSet/>
-      <dgm:spPr/>
-      <dgm:t>
-        <a:bodyPr/>
-        <a:lstStyle/>
-        <a:p>
-          <a:endParaRPr lang="es-CL"/>
-        </a:p>
-      </dgm:t>
-    </dgm:pt>
-    <dgm:pt modelId="{D868444B-AE34-4422-A6A5-1F7D392D0C20}">
-      <dgm:prSet phldrT="[Texto]"/>
-      <dgm:spPr/>
-      <dgm:t>
-        <a:bodyPr/>
-        <a:lstStyle/>
-        <a:p>
-          <a:r>
-            <a:rPr lang="es-MX" dirty="0"/>
-            <a:t>Cargo</a:t>
-          </a:r>
-          <a:endParaRPr lang="es-CL" dirty="0"/>
-        </a:p>
-      </dgm:t>
-    </dgm:pt>
-    <dgm:pt modelId="{7DB88D83-6C3A-48C1-8CAD-0D11C3BEC35C}" type="parTrans" cxnId="{484B8A37-0122-4FF5-93D2-4A15DF521A17}">
-      <dgm:prSet/>
-      <dgm:spPr/>
-      <dgm:t>
-        <a:bodyPr/>
-        <a:lstStyle/>
-        <a:p>
-          <a:endParaRPr lang="es-CL"/>
-        </a:p>
-      </dgm:t>
-    </dgm:pt>
-    <dgm:pt modelId="{74B9B1A5-94EB-40A9-BFF2-678501068FB8}" type="sibTrans" cxnId="{484B8A37-0122-4FF5-93D2-4A15DF521A17}">
       <dgm:prSet/>
       <dgm:spPr/>
       <dgm:t>
@@ -1019,43 +987,6 @@
       </dgm:t>
     </dgm:pt>
     <dgm:pt modelId="{1CCC8D2D-CD28-4814-B055-28ABD65CA276}" type="sibTrans" cxnId="{4FE7AF63-70AC-4ED4-8BFB-DCB2408F3318}">
-      <dgm:prSet/>
-      <dgm:spPr/>
-      <dgm:t>
-        <a:bodyPr/>
-        <a:lstStyle/>
-        <a:p>
-          <a:endParaRPr lang="es-CL"/>
-        </a:p>
-      </dgm:t>
-    </dgm:pt>
-    <dgm:pt modelId="{2E221207-005F-49CB-81E1-6D036D64322B}">
-      <dgm:prSet phldrT="[Texto]"/>
-      <dgm:spPr/>
-      <dgm:t>
-        <a:bodyPr/>
-        <a:lstStyle/>
-        <a:p>
-          <a:r>
-            <a:rPr lang="es-MX" dirty="0"/>
-            <a:t>Funciones desempeñadas</a:t>
-          </a:r>
-          <a:endParaRPr lang="es-CL" dirty="0"/>
-        </a:p>
-      </dgm:t>
-    </dgm:pt>
-    <dgm:pt modelId="{3728DB5E-E904-481D-A1E5-49CF4AFFC0D3}" type="sibTrans" cxnId="{1C3272C9-C630-4D60-B76B-138907BB4D41}">
-      <dgm:prSet/>
-      <dgm:spPr/>
-      <dgm:t>
-        <a:bodyPr/>
-        <a:lstStyle/>
-        <a:p>
-          <a:endParaRPr lang="es-CL"/>
-        </a:p>
-      </dgm:t>
-    </dgm:pt>
-    <dgm:pt modelId="{B200B6AA-AA2A-4CB8-80FF-4BB54938E8A5}" type="parTrans" cxnId="{1C3272C9-C630-4D60-B76B-138907BB4D41}">
       <dgm:prSet/>
       <dgm:spPr/>
       <dgm:t>
@@ -1214,6 +1145,66 @@
         </a:p>
       </dgm:t>
     </dgm:pt>
+    <dgm:pt modelId="{D868444B-AE34-4422-A6A5-1F7D392D0C20}">
+      <dgm:prSet phldrT="[Texto]"/>
+      <dgm:spPr/>
+      <dgm:t>
+        <a:bodyPr/>
+        <a:lstStyle/>
+        <a:p>
+          <a:r>
+            <a:rPr lang="es-MX" dirty="0"/>
+            <a:t>Gestor de proyectos y Líder del proyecto</a:t>
+          </a:r>
+          <a:endParaRPr lang="es-CL" dirty="0"/>
+        </a:p>
+      </dgm:t>
+    </dgm:pt>
+    <dgm:pt modelId="{74B9B1A5-94EB-40A9-BFF2-678501068FB8}" type="sibTrans" cxnId="{484B8A37-0122-4FF5-93D2-4A15DF521A17}">
+      <dgm:prSet/>
+      <dgm:spPr/>
+      <dgm:t>
+        <a:bodyPr/>
+        <a:lstStyle/>
+        <a:p>
+          <a:endParaRPr lang="es-CL"/>
+        </a:p>
+      </dgm:t>
+    </dgm:pt>
+    <dgm:pt modelId="{7DB88D83-6C3A-48C1-8CAD-0D11C3BEC35C}" type="parTrans" cxnId="{484B8A37-0122-4FF5-93D2-4A15DF521A17}">
+      <dgm:prSet/>
+      <dgm:spPr/>
+      <dgm:t>
+        <a:bodyPr/>
+        <a:lstStyle/>
+        <a:p>
+          <a:endParaRPr lang="es-CL"/>
+        </a:p>
+      </dgm:t>
+    </dgm:pt>
+    <dgm:pt modelId="{62F1AA66-C25A-4E90-9F94-A2481F187857}">
+      <dgm:prSet phldrT="[Texto]"/>
+      <dgm:spPr/>
+      <dgm:t>
+        <a:bodyPr/>
+        <a:lstStyle/>
+        <a:p>
+          <a:r>
+            <a:rPr lang="es-MX" dirty="0"/>
+            <a:t>Tener los documentos, ayudar y guiar al equipo</a:t>
+          </a:r>
+          <a:endParaRPr lang="es-CL" dirty="0"/>
+        </a:p>
+      </dgm:t>
+    </dgm:pt>
+    <dgm:pt modelId="{7F4727AC-1BDA-4A7C-9217-23F0312BC14B}" type="parTrans" cxnId="{24A7E5C3-B54B-4DF2-8B73-0A88F3EB4070}">
+      <dgm:prSet/>
+      <dgm:spPr/>
+    </dgm:pt>
+    <dgm:pt modelId="{C526E7B5-A8A2-4E42-843E-203585FE8244}" type="sibTrans" cxnId="{24A7E5C3-B54B-4DF2-8B73-0A88F3EB4070}">
+      <dgm:prSet/>
+      <dgm:spPr/>
+    </dgm:pt>
     <dgm:pt modelId="{6E1E561E-88C1-49C6-A3F7-DE4B9AD43273}" type="pres">
       <dgm:prSet presAssocID="{BE45140C-C326-4DAA-A267-498AD5117D68}" presName="linear" presStyleCnt="0">
         <dgm:presLayoutVars>
@@ -1233,7 +1224,21 @@
     </dgm:pt>
     <dgm:pt modelId="{9A7E2690-DE9C-4572-9BE5-B8C9A3B8BBB3}" type="pres">
       <dgm:prSet presAssocID="{78BFB295-8F5D-4286-B72B-79142F8F0E13}" presName="img" presStyleLbl="fgImgPlace1" presStyleIdx="0" presStyleCnt="3"/>
-      <dgm:spPr/>
+      <dgm:spPr>
+        <a:blipFill>
+          <a:blip xmlns:r="http://schemas.openxmlformats.org/officeDocument/2006/relationships" r:embed="rId1">
+            <a:extLst>
+              <a:ext uri="{28A0092B-C50C-407E-A947-70E740481C1C}">
+                <a14:useLocalDpi xmlns:a14="http://schemas.microsoft.com/office/drawing/2010/main" val="0"/>
+              </a:ext>
+            </a:extLst>
+          </a:blip>
+          <a:srcRect/>
+          <a:stretch>
+            <a:fillRect t="-66000" b="-66000"/>
+          </a:stretch>
+        </a:blipFill>
+      </dgm:spPr>
     </dgm:pt>
     <dgm:pt modelId="{52D125D2-FCA7-4A2D-AB39-B6BD54F251F2}" type="pres">
       <dgm:prSet presAssocID="{78BFB295-8F5D-4286-B72B-79142F8F0E13}" presName="text" presStyleLbl="node1" presStyleIdx="0" presStyleCnt="3">
@@ -1293,7 +1298,6 @@
     </dgm:pt>
   </dgm:ptLst>
   <dgm:cxnLst>
-    <dgm:cxn modelId="{399BD705-2380-48A3-9C48-1D49A5A32D61}" type="presOf" srcId="{2E221207-005F-49CB-81E1-6D036D64322B}" destId="{52D125D2-FCA7-4A2D-AB39-B6BD54F251F2}" srcOrd="1" destOrd="2" presId="urn:microsoft.com/office/officeart/2005/8/layout/vList4"/>
     <dgm:cxn modelId="{D2B94F0C-C779-4AC1-87E4-35116A3DED02}" type="presOf" srcId="{78BFB295-8F5D-4286-B72B-79142F8F0E13}" destId="{54FC4CB6-0791-48D3-B2C5-2E99B8AFCFF7}" srcOrd="0" destOrd="0" presId="urn:microsoft.com/office/officeart/2005/8/layout/vList4"/>
     <dgm:cxn modelId="{D5771F2D-99A4-4884-A896-FA1E2DEFDD88}" srcId="{99FF0D0F-282A-4030-9AF5-3B7621881539}" destId="{A2BD12B5-7AB5-4859-B57E-1E77C0ED35DF}" srcOrd="0" destOrd="0" parTransId="{AC7F7F07-A811-4CCD-BBFE-DAA4D1F5EE40}" sibTransId="{35EEEEB1-B116-40C6-8142-8F938AF38B0B}"/>
     <dgm:cxn modelId="{3A21ED2D-BFFE-4942-BD04-AB5B9DC419E5}" type="presOf" srcId="{99FF0D0F-282A-4030-9AF5-3B7621881539}" destId="{F36F4ED1-B414-46B8-A8C5-C0FB11F5CFBC}" srcOrd="0" destOrd="0" presId="urn:microsoft.com/office/officeart/2005/8/layout/vList4"/>
@@ -1309,16 +1313,17 @@
     <dgm:cxn modelId="{2AD07198-D472-4B98-B6D5-5A730374E9A2}" srcId="{BE45140C-C326-4DAA-A267-498AD5117D68}" destId="{78BFB295-8F5D-4286-B72B-79142F8F0E13}" srcOrd="0" destOrd="0" parTransId="{F1885FAB-61EC-4F80-98D0-72360031AF9F}" sibTransId="{E88D0928-51D4-4670-8963-60ABBB193E13}"/>
     <dgm:cxn modelId="{FBEF4C9A-E5D4-462C-B35F-96C87426BEAB}" type="presOf" srcId="{A2BD12B5-7AB5-4859-B57E-1E77C0ED35DF}" destId="{F36F4ED1-B414-46B8-A8C5-C0FB11F5CFBC}" srcOrd="0" destOrd="1" presId="urn:microsoft.com/office/officeart/2005/8/layout/vList4"/>
     <dgm:cxn modelId="{690A389C-25C1-485B-88F9-437236A47744}" type="presOf" srcId="{BE45140C-C326-4DAA-A267-498AD5117D68}" destId="{6E1E561E-88C1-49C6-A3F7-DE4B9AD43273}" srcOrd="0" destOrd="0" presId="urn:microsoft.com/office/officeart/2005/8/layout/vList4"/>
+    <dgm:cxn modelId="{6371ED9D-4AE7-44F3-8BCE-C936BF4BA99F}" type="presOf" srcId="{62F1AA66-C25A-4E90-9F94-A2481F187857}" destId="{54FC4CB6-0791-48D3-B2C5-2E99B8AFCFF7}" srcOrd="0" destOrd="2" presId="urn:microsoft.com/office/officeart/2005/8/layout/vList4"/>
     <dgm:cxn modelId="{ECFD91A4-F44F-4C84-8B25-37DA0B249A1F}" type="presOf" srcId="{78BFB295-8F5D-4286-B72B-79142F8F0E13}" destId="{52D125D2-FCA7-4A2D-AB39-B6BD54F251F2}" srcOrd="1" destOrd="0" presId="urn:microsoft.com/office/officeart/2005/8/layout/vList4"/>
     <dgm:cxn modelId="{67DE09B5-392E-4661-A7AE-A0572D63DA68}" type="presOf" srcId="{99FF0D0F-282A-4030-9AF5-3B7621881539}" destId="{0E12AD21-08CC-4736-A269-DD5234F9D874}" srcOrd="1" destOrd="0" presId="urn:microsoft.com/office/officeart/2005/8/layout/vList4"/>
     <dgm:cxn modelId="{778F2DBC-81F3-476D-BD99-784E4F7153C8}" srcId="{02A34BC0-F8BA-4A89-87A4-4F20079DFD06}" destId="{EA3B2395-55AF-495E-9D6B-329D2886612F}" srcOrd="0" destOrd="0" parTransId="{01DA10B6-3F7A-4C8A-AACD-F605EE6CCF20}" sibTransId="{11A4E056-7834-4F82-8A9C-B8EA31F159E3}"/>
+    <dgm:cxn modelId="{771AC4C3-43B6-4708-AF74-1C09D131840F}" type="presOf" srcId="{62F1AA66-C25A-4E90-9F94-A2481F187857}" destId="{52D125D2-FCA7-4A2D-AB39-B6BD54F251F2}" srcOrd="1" destOrd="2" presId="urn:microsoft.com/office/officeart/2005/8/layout/vList4"/>
+    <dgm:cxn modelId="{24A7E5C3-B54B-4DF2-8B73-0A88F3EB4070}" srcId="{78BFB295-8F5D-4286-B72B-79142F8F0E13}" destId="{62F1AA66-C25A-4E90-9F94-A2481F187857}" srcOrd="1" destOrd="0" parTransId="{7F4727AC-1BDA-4A7C-9217-23F0312BC14B}" sibTransId="{C526E7B5-A8A2-4E42-843E-203585FE8244}"/>
     <dgm:cxn modelId="{FE5360C5-555C-42B2-9E63-16D2D46F21B1}" type="presOf" srcId="{D868444B-AE34-4422-A6A5-1F7D392D0C20}" destId="{52D125D2-FCA7-4A2D-AB39-B6BD54F251F2}" srcOrd="1" destOrd="1" presId="urn:microsoft.com/office/officeart/2005/8/layout/vList4"/>
-    <dgm:cxn modelId="{1C3272C9-C630-4D60-B76B-138907BB4D41}" srcId="{78BFB295-8F5D-4286-B72B-79142F8F0E13}" destId="{2E221207-005F-49CB-81E1-6D036D64322B}" srcOrd="1" destOrd="0" parTransId="{B200B6AA-AA2A-4CB8-80FF-4BB54938E8A5}" sibTransId="{3728DB5E-E904-481D-A1E5-49CF4AFFC0D3}"/>
     <dgm:cxn modelId="{B0C181C9-77EB-4775-B9E6-C6CBDA60E6EB}" type="presOf" srcId="{EA3B2395-55AF-495E-9D6B-329D2886612F}" destId="{CFFDF23F-D296-4CDF-8EE4-8A672559E207}" srcOrd="1" destOrd="1" presId="urn:microsoft.com/office/officeart/2005/8/layout/vList4"/>
     <dgm:cxn modelId="{ECED70CB-7A25-48F8-9E03-51596FB1E92C}" srcId="{02A34BC0-F8BA-4A89-87A4-4F20079DFD06}" destId="{55A2A9EB-4C26-43C3-B721-D475B10BC39B}" srcOrd="1" destOrd="0" parTransId="{B8424EB2-FFE7-4867-9D5A-EE0D46E8AAFE}" sibTransId="{4EF4588A-187C-4393-9DFC-C6D80B20E995}"/>
     <dgm:cxn modelId="{D1C04ECF-982A-425F-B2B1-9CF15BCEB83B}" type="presOf" srcId="{D546635F-000B-49DF-BB26-293CCA777400}" destId="{0E12AD21-08CC-4736-A269-DD5234F9D874}" srcOrd="1" destOrd="2" presId="urn:microsoft.com/office/officeart/2005/8/layout/vList4"/>
     <dgm:cxn modelId="{22A4C7D2-C14A-4622-8C4E-3FE51F50DCC3}" type="presOf" srcId="{02A34BC0-F8BA-4A89-87A4-4F20079DFD06}" destId="{CFFDF23F-D296-4CDF-8EE4-8A672559E207}" srcOrd="1" destOrd="0" presId="urn:microsoft.com/office/officeart/2005/8/layout/vList4"/>
-    <dgm:cxn modelId="{A70C9FD5-2935-4C81-937A-B6C05F5E54BA}" type="presOf" srcId="{2E221207-005F-49CB-81E1-6D036D64322B}" destId="{54FC4CB6-0791-48D3-B2C5-2E99B8AFCFF7}" srcOrd="0" destOrd="2" presId="urn:microsoft.com/office/officeart/2005/8/layout/vList4"/>
     <dgm:cxn modelId="{AC0A7FF3-EEC4-470A-823E-BF7AF1556A99}" srcId="{99FF0D0F-282A-4030-9AF5-3B7621881539}" destId="{D546635F-000B-49DF-BB26-293CCA777400}" srcOrd="1" destOrd="0" parTransId="{5437D343-BECF-4620-B6C7-7088D8BBD91B}" sibTransId="{B01A0825-9EDF-4B9A-B345-1B486D914AD4}"/>
     <dgm:cxn modelId="{7ABE08FD-4ED4-44FB-BFBA-794B6C5FA813}" type="presOf" srcId="{EA3B2395-55AF-495E-9D6B-329D2886612F}" destId="{39AFE128-ACF6-44CA-B18B-64F5782CF210}" srcOrd="0" destOrd="1" presId="urn:microsoft.com/office/officeart/2005/8/layout/vList4"/>
     <dgm:cxn modelId="{DA463EE6-78DB-4E59-8099-EBA029F401B0}" type="presParOf" srcId="{6E1E561E-88C1-49C6-A3F7-DE4B9AD43273}" destId="{F70979D0-5925-4EC3-AD84-986E0EC7B0D8}" srcOrd="0" destOrd="0" presId="urn:microsoft.com/office/officeart/2005/8/layout/vList4"/>
@@ -1452,7 +1457,7 @@
           </a:pPr>
           <a:r>
             <a:rPr lang="es-MX" sz="2600" kern="1200" dirty="0"/>
-            <a:t>Nombre de estudiante</a:t>
+            <a:t>Benjamín Alejandro Bravo Rivadeneira</a:t>
           </a:r>
           <a:endParaRPr lang="es-CL" sz="2600" kern="1200" dirty="0"/>
         </a:p>
@@ -1471,7 +1476,7 @@
           </a:pPr>
           <a:r>
             <a:rPr lang="es-MX" sz="2000" kern="1200" dirty="0"/>
-            <a:t>Cargo</a:t>
+            <a:t>Gestor de proyectos y Líder del proyecto</a:t>
           </a:r>
           <a:endParaRPr lang="es-CL" sz="2000" kern="1200" dirty="0"/>
         </a:p>
@@ -1490,7 +1495,7 @@
           </a:pPr>
           <a:r>
             <a:rPr lang="es-MX" sz="2000" kern="1200" dirty="0"/>
-            <a:t>Funciones desempeñadas</a:t>
+            <a:t>Tener los documentos, ayudar y guiar al equipo</a:t>
           </a:r>
           <a:endParaRPr lang="es-CL" sz="2000" kern="1200" dirty="0"/>
         </a:p>
@@ -1515,15 +1520,19 @@
             <a:gd name="adj" fmla="val 10000"/>
           </a:avLst>
         </a:prstGeom>
-        <a:solidFill>
-          <a:schemeClr val="accent5">
-            <a:tint val="50000"/>
-            <a:hueOff val="0"/>
-            <a:satOff val="0"/>
-            <a:lumOff val="0"/>
-            <a:alphaOff val="0"/>
-          </a:schemeClr>
-        </a:solidFill>
+        <a:blipFill>
+          <a:blip xmlns:r="http://schemas.openxmlformats.org/officeDocument/2006/relationships" r:embed="rId1">
+            <a:extLst>
+              <a:ext uri="{28A0092B-C50C-407E-A947-70E740481C1C}">
+                <a14:useLocalDpi xmlns:a14="http://schemas.microsoft.com/office/drawing/2010/main" val="0"/>
+              </a:ext>
+            </a:extLst>
+          </a:blip>
+          <a:srcRect/>
+          <a:stretch>
+            <a:fillRect t="-66000" b="-66000"/>
+          </a:stretch>
+        </a:blipFill>
         <a:ln>
           <a:noFill/>
         </a:ln>
@@ -3330,7 +3339,7 @@
           <a:p>
             <a:fld id="{6E1704C8-43E3-4F4F-BE90-356A640D5754}" type="datetimeFigureOut">
               <a:rPr lang="es-CL" smtClean="0"/>
-              <a:t>28-10-2023</a:t>
+              <a:t>17-11-2025</a:t>
             </a:fld>
             <a:endParaRPr lang="es-CL"/>
           </a:p>
@@ -3533,7 +3542,7 @@
           <a:p>
             <a:fld id="{6E1704C8-43E3-4F4F-BE90-356A640D5754}" type="datetimeFigureOut">
               <a:rPr lang="es-CL" smtClean="0"/>
-              <a:t>28-10-2023</a:t>
+              <a:t>17-11-2025</a:t>
             </a:fld>
             <a:endParaRPr lang="es-CL"/>
           </a:p>
@@ -3746,7 +3755,7 @@
           <a:p>
             <a:fld id="{6E1704C8-43E3-4F4F-BE90-356A640D5754}" type="datetimeFigureOut">
               <a:rPr lang="es-CL" smtClean="0"/>
-              <a:t>28-10-2023</a:t>
+              <a:t>17-11-2025</a:t>
             </a:fld>
             <a:endParaRPr lang="es-CL"/>
           </a:p>
@@ -3949,7 +3958,7 @@
           <a:p>
             <a:fld id="{6E1704C8-43E3-4F4F-BE90-356A640D5754}" type="datetimeFigureOut">
               <a:rPr lang="es-CL" smtClean="0"/>
-              <a:t>28-10-2023</a:t>
+              <a:t>17-11-2025</a:t>
             </a:fld>
             <a:endParaRPr lang="es-CL"/>
           </a:p>
@@ -4228,7 +4237,7 @@
           <a:p>
             <a:fld id="{6E1704C8-43E3-4F4F-BE90-356A640D5754}" type="datetimeFigureOut">
               <a:rPr lang="es-CL" smtClean="0"/>
-              <a:t>28-10-2023</a:t>
+              <a:t>17-11-2025</a:t>
             </a:fld>
             <a:endParaRPr lang="es-CL"/>
           </a:p>
@@ -4499,7 +4508,7 @@
           <a:p>
             <a:fld id="{6E1704C8-43E3-4F4F-BE90-356A640D5754}" type="datetimeFigureOut">
               <a:rPr lang="es-CL" smtClean="0"/>
-              <a:t>28-10-2023</a:t>
+              <a:t>17-11-2025</a:t>
             </a:fld>
             <a:endParaRPr lang="es-CL"/>
           </a:p>
@@ -4917,7 +4926,7 @@
           <a:p>
             <a:fld id="{6E1704C8-43E3-4F4F-BE90-356A640D5754}" type="datetimeFigureOut">
               <a:rPr lang="es-CL" smtClean="0"/>
-              <a:t>28-10-2023</a:t>
+              <a:t>17-11-2025</a:t>
             </a:fld>
             <a:endParaRPr lang="es-CL"/>
           </a:p>
@@ -5062,7 +5071,7 @@
           <a:p>
             <a:fld id="{6E1704C8-43E3-4F4F-BE90-356A640D5754}" type="datetimeFigureOut">
               <a:rPr lang="es-CL" smtClean="0"/>
-              <a:t>28-10-2023</a:t>
+              <a:t>17-11-2025</a:t>
             </a:fld>
             <a:endParaRPr lang="es-CL"/>
           </a:p>
@@ -5178,7 +5187,7 @@
           <a:p>
             <a:fld id="{6E1704C8-43E3-4F4F-BE90-356A640D5754}" type="datetimeFigureOut">
               <a:rPr lang="es-CL" smtClean="0"/>
-              <a:t>28-10-2023</a:t>
+              <a:t>17-11-2025</a:t>
             </a:fld>
             <a:endParaRPr lang="es-CL"/>
           </a:p>
@@ -5494,7 +5503,7 @@
           <a:p>
             <a:fld id="{6E1704C8-43E3-4F4F-BE90-356A640D5754}" type="datetimeFigureOut">
               <a:rPr lang="es-CL" smtClean="0"/>
-              <a:t>28-10-2023</a:t>
+              <a:t>17-11-2025</a:t>
             </a:fld>
             <a:endParaRPr lang="es-CL"/>
           </a:p>
@@ -5786,7 +5795,7 @@
           <a:p>
             <a:fld id="{6E1704C8-43E3-4F4F-BE90-356A640D5754}" type="datetimeFigureOut">
               <a:rPr lang="es-CL" smtClean="0"/>
-              <a:t>28-10-2023</a:t>
+              <a:t>17-11-2025</a:t>
             </a:fld>
             <a:endParaRPr lang="es-CL"/>
           </a:p>
@@ -6032,7 +6041,7 @@
           <a:p>
             <a:fld id="{6E1704C8-43E3-4F4F-BE90-356A640D5754}" type="datetimeFigureOut">
               <a:rPr lang="es-CL" smtClean="0"/>
-              <a:t>28-10-2023</a:t>
+              <a:t>17-11-2025</a:t>
             </a:fld>
             <a:endParaRPr lang="es-CL"/>
           </a:p>
@@ -6514,7 +6523,7 @@
         <p:spPr>
           <a:xfrm>
             <a:off x="1" y="2707792"/>
-            <a:ext cx="12191999" cy="1138773"/>
+            <a:ext cx="12191999" cy="1815882"/>
           </a:xfrm>
           <a:prstGeom prst="rect">
             <a:avLst/>
@@ -6530,7 +6539,44 @@
             <a:pPr algn="ctr"/>
             <a:r>
               <a:rPr lang="es-MX" sz="4400" dirty="0"/>
-              <a:t>PROYECTO “NOMBRE DEL PROYECTO”</a:t>
+              <a:t>PROYECTO “I</a:t>
+            </a:r>
+            <a:r>
+              <a:rPr lang="es-CL" sz="4400" b="1" i="0" dirty="0" err="1">
+                <a:effectLst/>
+              </a:rPr>
+              <a:t>nclushop</a:t>
+            </a:r>
+            <a:r>
+              <a:rPr lang="es-CL" sz="4400" b="1" i="0" dirty="0">
+                <a:effectLst/>
+              </a:rPr>
+              <a:t> : Herramientas para un </a:t>
+            </a:r>
+          </a:p>
+          <a:p>
+            <a:pPr algn="ctr"/>
+            <a:r>
+              <a:rPr lang="es-CL" sz="4400" b="1" i="0" dirty="0">
+                <a:effectLst/>
+              </a:rPr>
+              <a:t>E-</a:t>
+            </a:r>
+            <a:r>
+              <a:rPr lang="es-CL" sz="4400" b="1" i="0" dirty="0" err="1">
+                <a:effectLst/>
+              </a:rPr>
+              <a:t>commerce</a:t>
+            </a:r>
+            <a:r>
+              <a:rPr lang="es-CL" sz="4400" b="1" i="0" dirty="0">
+                <a:effectLst/>
+              </a:rPr>
+              <a:t> inclusivo</a:t>
+            </a:r>
+            <a:r>
+              <a:rPr lang="es-MX" sz="4400" dirty="0"/>
+              <a:t>”</a:t>
             </a:r>
           </a:p>
           <a:p>
@@ -7345,7 +7391,7 @@
           <p:nvPr>
             <p:extLst>
               <p:ext uri="{D42A27DB-BD31-4B8C-83A1-F6EECF244321}">
-                <p14:modId xmlns:p14="http://schemas.microsoft.com/office/powerpoint/2010/main" val="809683936"/>
+                <p14:modId xmlns:p14="http://schemas.microsoft.com/office/powerpoint/2010/main" val="972565903"/>
               </p:ext>
             </p:extLst>
           </p:nvPr>
@@ -7786,8 +7832,8 @@
           <a:p>
             <a:pPr algn="just"/>
             <a:r>
-              <a:rPr lang="es-MX" sz="1800" dirty="0"/>
-              <a:t>Descripción</a:t>
+              <a:rPr lang="es-MX" dirty="0"/>
+              <a:t>El proyecto busca desarrollar una plataforma de comercio electrónico inclusiva, que permita a personas con discapacidad visual o dificultades motrices navegar y comprar productos usando comandos de voz y narración automática. Además, contará con un asistente virtual para guiar el proceso de compra.</a:t>
             </a:r>
             <a:endParaRPr lang="es-CL" sz="1800" dirty="0"/>
           </a:p>
@@ -7852,7 +7898,7 @@
             <a:pPr lvl="0" algn="just"/>
             <a:r>
               <a:rPr lang="es-MX" dirty="0"/>
-              <a:t>Descripción</a:t>
+              <a:t>Nuestra propuesta de solución es un</a:t>
             </a:r>
             <a:endParaRPr lang="es-CL" sz="1800" dirty="0"/>
           </a:p>

--- a/Fase 3/Evidencias Grupales/Formato Presentación final.pptx
+++ b/Fase 3/Evidencias Grupales/Formato Presentación final.pptx
@@ -3339,7 +3339,7 @@
           <a:p>
             <a:fld id="{6E1704C8-43E3-4F4F-BE90-356A640D5754}" type="datetimeFigureOut">
               <a:rPr lang="es-CL" smtClean="0"/>
-              <a:t>17-11-2025</a:t>
+              <a:t>18-11-2025</a:t>
             </a:fld>
             <a:endParaRPr lang="es-CL"/>
           </a:p>
@@ -3542,7 +3542,7 @@
           <a:p>
             <a:fld id="{6E1704C8-43E3-4F4F-BE90-356A640D5754}" type="datetimeFigureOut">
               <a:rPr lang="es-CL" smtClean="0"/>
-              <a:t>17-11-2025</a:t>
+              <a:t>18-11-2025</a:t>
             </a:fld>
             <a:endParaRPr lang="es-CL"/>
           </a:p>
@@ -3755,7 +3755,7 @@
           <a:p>
             <a:fld id="{6E1704C8-43E3-4F4F-BE90-356A640D5754}" type="datetimeFigureOut">
               <a:rPr lang="es-CL" smtClean="0"/>
-              <a:t>17-11-2025</a:t>
+              <a:t>18-11-2025</a:t>
             </a:fld>
             <a:endParaRPr lang="es-CL"/>
           </a:p>
@@ -3958,7 +3958,7 @@
           <a:p>
             <a:fld id="{6E1704C8-43E3-4F4F-BE90-356A640D5754}" type="datetimeFigureOut">
               <a:rPr lang="es-CL" smtClean="0"/>
-              <a:t>17-11-2025</a:t>
+              <a:t>18-11-2025</a:t>
             </a:fld>
             <a:endParaRPr lang="es-CL"/>
           </a:p>
@@ -4237,7 +4237,7 @@
           <a:p>
             <a:fld id="{6E1704C8-43E3-4F4F-BE90-356A640D5754}" type="datetimeFigureOut">
               <a:rPr lang="es-CL" smtClean="0"/>
-              <a:t>17-11-2025</a:t>
+              <a:t>18-11-2025</a:t>
             </a:fld>
             <a:endParaRPr lang="es-CL"/>
           </a:p>
@@ -4508,7 +4508,7 @@
           <a:p>
             <a:fld id="{6E1704C8-43E3-4F4F-BE90-356A640D5754}" type="datetimeFigureOut">
               <a:rPr lang="es-CL" smtClean="0"/>
-              <a:t>17-11-2025</a:t>
+              <a:t>18-11-2025</a:t>
             </a:fld>
             <a:endParaRPr lang="es-CL"/>
           </a:p>
@@ -4926,7 +4926,7 @@
           <a:p>
             <a:fld id="{6E1704C8-43E3-4F4F-BE90-356A640D5754}" type="datetimeFigureOut">
               <a:rPr lang="es-CL" smtClean="0"/>
-              <a:t>17-11-2025</a:t>
+              <a:t>18-11-2025</a:t>
             </a:fld>
             <a:endParaRPr lang="es-CL"/>
           </a:p>
@@ -5071,7 +5071,7 @@
           <a:p>
             <a:fld id="{6E1704C8-43E3-4F4F-BE90-356A640D5754}" type="datetimeFigureOut">
               <a:rPr lang="es-CL" smtClean="0"/>
-              <a:t>17-11-2025</a:t>
+              <a:t>18-11-2025</a:t>
             </a:fld>
             <a:endParaRPr lang="es-CL"/>
           </a:p>
@@ -5187,7 +5187,7 @@
           <a:p>
             <a:fld id="{6E1704C8-43E3-4F4F-BE90-356A640D5754}" type="datetimeFigureOut">
               <a:rPr lang="es-CL" smtClean="0"/>
-              <a:t>17-11-2025</a:t>
+              <a:t>18-11-2025</a:t>
             </a:fld>
             <a:endParaRPr lang="es-CL"/>
           </a:p>
@@ -5503,7 +5503,7 @@
           <a:p>
             <a:fld id="{6E1704C8-43E3-4F4F-BE90-356A640D5754}" type="datetimeFigureOut">
               <a:rPr lang="es-CL" smtClean="0"/>
-              <a:t>17-11-2025</a:t>
+              <a:t>18-11-2025</a:t>
             </a:fld>
             <a:endParaRPr lang="es-CL"/>
           </a:p>
@@ -5795,7 +5795,7 @@
           <a:p>
             <a:fld id="{6E1704C8-43E3-4F4F-BE90-356A640D5754}" type="datetimeFigureOut">
               <a:rPr lang="es-CL" smtClean="0"/>
-              <a:t>17-11-2025</a:t>
+              <a:t>18-11-2025</a:t>
             </a:fld>
             <a:endParaRPr lang="es-CL"/>
           </a:p>
@@ -6041,7 +6041,7 @@
           <a:p>
             <a:fld id="{6E1704C8-43E3-4F4F-BE90-356A640D5754}" type="datetimeFigureOut">
               <a:rPr lang="es-CL" smtClean="0"/>
-              <a:t>17-11-2025</a:t>
+              <a:t>18-11-2025</a:t>
             </a:fld>
             <a:endParaRPr lang="es-CL"/>
           </a:p>
@@ -7442,7 +7442,45 @@
                   </a:schemeClr>
                 </a:solidFill>
               </a:rPr>
-              <a:t>PROYECTO “NOMBRE DEL PROYECTO”</a:t>
+              <a:t>PROYECTO  “</a:t>
+            </a:r>
+            <a:r>
+              <a:rPr lang="es-MX" sz="1800" dirty="0"/>
+              <a:t>I</a:t>
+            </a:r>
+            <a:r>
+              <a:rPr lang="es-CL" sz="1800" i="0" dirty="0" err="1">
+                <a:effectLst/>
+              </a:rPr>
+              <a:t>nclushop</a:t>
+            </a:r>
+            <a:r>
+              <a:rPr lang="es-CL" sz="1800" i="0" dirty="0">
+                <a:effectLst/>
+              </a:rPr>
+              <a:t> : Herramientas para un E-</a:t>
+            </a:r>
+            <a:r>
+              <a:rPr lang="es-CL" sz="1800" i="0" dirty="0" err="1">
+                <a:effectLst/>
+              </a:rPr>
+              <a:t>commerce</a:t>
+            </a:r>
+            <a:r>
+              <a:rPr lang="es-CL" sz="1800" i="0" dirty="0">
+                <a:effectLst/>
+              </a:rPr>
+              <a:t> inclusivo</a:t>
+            </a:r>
+            <a:r>
+              <a:rPr lang="es-MX" dirty="0">
+                <a:solidFill>
+                  <a:schemeClr val="bg2">
+                    <a:lumMod val="50000"/>
+                  </a:schemeClr>
+                </a:solidFill>
+              </a:rPr>
+              <a:t>”</a:t>
             </a:r>
           </a:p>
         </p:txBody>
@@ -7898,7 +7936,15 @@
             <a:pPr lvl="0" algn="just"/>
             <a:r>
               <a:rPr lang="es-MX" dirty="0"/>
-              <a:t>Nuestra propuesta de solución es un</a:t>
+              <a:t>Nuestra propuesta de solución es un kit de herramientas (Plug-In) para que personas con las discapacidades anteriormente mencionadas, mediante los comandos de Voz  y la narrativa automática en </a:t>
+            </a:r>
+            <a:r>
+              <a:rPr lang="es-MX" dirty="0" err="1"/>
+              <a:t>conjuto</a:t>
+            </a:r>
+            <a:r>
+              <a:rPr lang="es-MX" dirty="0"/>
+              <a:t> </a:t>
             </a:r>
             <a:endParaRPr lang="es-CL" sz="1800" dirty="0"/>
           </a:p>
@@ -8242,7 +8288,45 @@
                   </a:schemeClr>
                 </a:solidFill>
               </a:rPr>
-              <a:t>PROYECTO “NOMBRE DEL PROYECTO”</a:t>
+              <a:t>PROYECTO  “</a:t>
+            </a:r>
+            <a:r>
+              <a:rPr lang="es-MX" sz="1800" dirty="0"/>
+              <a:t>I</a:t>
+            </a:r>
+            <a:r>
+              <a:rPr lang="es-CL" sz="1800" i="0" dirty="0" err="1">
+                <a:effectLst/>
+              </a:rPr>
+              <a:t>nclushop</a:t>
+            </a:r>
+            <a:r>
+              <a:rPr lang="es-CL" sz="1800" i="0" dirty="0">
+                <a:effectLst/>
+              </a:rPr>
+              <a:t> : Herramientas para un E-</a:t>
+            </a:r>
+            <a:r>
+              <a:rPr lang="es-CL" sz="1800" i="0" dirty="0" err="1">
+                <a:effectLst/>
+              </a:rPr>
+              <a:t>commerce</a:t>
+            </a:r>
+            <a:r>
+              <a:rPr lang="es-CL" sz="1800" i="0" dirty="0">
+                <a:effectLst/>
+              </a:rPr>
+              <a:t> inclusivo</a:t>
+            </a:r>
+            <a:r>
+              <a:rPr lang="es-MX" dirty="0">
+                <a:solidFill>
+                  <a:schemeClr val="bg2">
+                    <a:lumMod val="50000"/>
+                  </a:schemeClr>
+                </a:solidFill>
+              </a:rPr>
+              <a:t>”</a:t>
             </a:r>
           </a:p>
         </p:txBody>
@@ -8429,10 +8513,6 @@
           <a:lstStyle/>
           <a:p>
             <a:pPr algn="ctr"/>
-            <a:r>
-              <a:rPr lang="es-MX" dirty="0"/>
-              <a:t>Descripción</a:t>
-            </a:r>
             <a:endParaRPr lang="es-CL" dirty="0"/>
           </a:p>
         </p:txBody>

--- a/Fase 3/Evidencias Grupales/Formato Presentación final.pptx
+++ b/Fase 3/Evidencias Grupales/Formato Presentación final.pptx
@@ -931,8 +931,8 @@
         <a:lstStyle/>
         <a:p>
           <a:r>
-            <a:rPr lang="es-MX"/>
-            <a:t>Nombre de estudiante</a:t>
+            <a:rPr lang="es-MX" dirty="0"/>
+            <a:t>Benjamín Ignacio Vargas Díaz</a:t>
           </a:r>
           <a:endParaRPr lang="es-CL" dirty="0"/>
         </a:p>
@@ -1080,7 +1080,7 @@
         <a:p>
           <a:r>
             <a:rPr lang="es-MX" dirty="0"/>
-            <a:t>Cargo</a:t>
+            <a:t>Gestor de base de datos y desarrollador</a:t>
           </a:r>
           <a:endParaRPr lang="es-CL" dirty="0"/>
         </a:p>
@@ -1108,43 +1108,6 @@
         </a:p>
       </dgm:t>
     </dgm:pt>
-    <dgm:pt modelId="{55A2A9EB-4C26-43C3-B721-D475B10BC39B}">
-      <dgm:prSet phldrT="[Texto]"/>
-      <dgm:spPr/>
-      <dgm:t>
-        <a:bodyPr/>
-        <a:lstStyle/>
-        <a:p>
-          <a:r>
-            <a:rPr lang="es-MX" dirty="0"/>
-            <a:t>Funciones desempeñadas</a:t>
-          </a:r>
-          <a:endParaRPr lang="es-CL" dirty="0"/>
-        </a:p>
-      </dgm:t>
-    </dgm:pt>
-    <dgm:pt modelId="{4EF4588A-187C-4393-9DFC-C6D80B20E995}" type="sibTrans" cxnId="{ECED70CB-7A25-48F8-9E03-51596FB1E92C}">
-      <dgm:prSet/>
-      <dgm:spPr/>
-      <dgm:t>
-        <a:bodyPr/>
-        <a:lstStyle/>
-        <a:p>
-          <a:endParaRPr lang="es-CL"/>
-        </a:p>
-      </dgm:t>
-    </dgm:pt>
-    <dgm:pt modelId="{B8424EB2-FFE7-4867-9D5A-EE0D46E8AAFE}" type="parTrans" cxnId="{ECED70CB-7A25-48F8-9E03-51596FB1E92C}">
-      <dgm:prSet/>
-      <dgm:spPr/>
-      <dgm:t>
-        <a:bodyPr/>
-        <a:lstStyle/>
-        <a:p>
-          <a:endParaRPr lang="es-CL"/>
-        </a:p>
-      </dgm:t>
-    </dgm:pt>
     <dgm:pt modelId="{D868444B-AE34-4422-A6A5-1F7D392D0C20}">
       <dgm:prSet phldrT="[Texto]"/>
       <dgm:spPr/>
@@ -1154,7 +1117,11 @@
         <a:p>
           <a:r>
             <a:rPr lang="es-MX" dirty="0"/>
-            <a:t>Gestor de proyectos y Líder del proyecto</a:t>
+            <a:t>Líder del proyecto y programado .</a:t>
+          </a:r>
+          <a:r>
+            <a:rPr lang="es-MX" dirty="0" err="1"/>
+            <a:t>js</a:t>
           </a:r>
           <a:endParaRPr lang="es-CL" dirty="0"/>
         </a:p>
@@ -1191,7 +1158,11 @@
         <a:p>
           <a:r>
             <a:rPr lang="es-MX" dirty="0"/>
-            <a:t>Tener los documentos, ayudar y guiar al equipo</a:t>
+            <a:t>Tener los documentos y programar validaciones en .</a:t>
+          </a:r>
+          <a:r>
+            <a:rPr lang="es-MX" dirty="0" err="1"/>
+            <a:t>js</a:t>
           </a:r>
           <a:endParaRPr lang="es-CL" dirty="0"/>
         </a:p>
@@ -1200,10 +1171,61 @@
     <dgm:pt modelId="{7F4727AC-1BDA-4A7C-9217-23F0312BC14B}" type="parTrans" cxnId="{24A7E5C3-B54B-4DF2-8B73-0A88F3EB4070}">
       <dgm:prSet/>
       <dgm:spPr/>
+      <dgm:t>
+        <a:bodyPr/>
+        <a:lstStyle/>
+        <a:p>
+          <a:endParaRPr lang="es-CL"/>
+        </a:p>
+      </dgm:t>
     </dgm:pt>
     <dgm:pt modelId="{C526E7B5-A8A2-4E42-843E-203585FE8244}" type="sibTrans" cxnId="{24A7E5C3-B54B-4DF2-8B73-0A88F3EB4070}">
       <dgm:prSet/>
       <dgm:spPr/>
+      <dgm:t>
+        <a:bodyPr/>
+        <a:lstStyle/>
+        <a:p>
+          <a:endParaRPr lang="es-CL"/>
+        </a:p>
+      </dgm:t>
+    </dgm:pt>
+    <dgm:pt modelId="{042CE47C-DE4F-4534-9D6F-3A0CF95D58A5}">
+      <dgm:prSet phldrT="[Texto]"/>
+      <dgm:spPr/>
+      <dgm:t>
+        <a:bodyPr/>
+        <a:lstStyle/>
+        <a:p>
+          <a:r>
+            <a:rPr lang="es-MX" dirty="0"/>
+            <a:t>Desarrollador y levantamiento del proyecto en la nube</a:t>
+          </a:r>
+          <a:endParaRPr lang="es-CL" dirty="0"/>
+        </a:p>
+      </dgm:t>
+    </dgm:pt>
+    <dgm:pt modelId="{F2A7D6BC-F441-4EC5-A51F-57C79CEBBCA8}" type="parTrans" cxnId="{F18066D4-6A13-46C2-B18C-B61313F1AD31}">
+      <dgm:prSet/>
+      <dgm:spPr/>
+      <dgm:t>
+        <a:bodyPr/>
+        <a:lstStyle/>
+        <a:p>
+          <a:endParaRPr lang="es-CL"/>
+        </a:p>
+      </dgm:t>
+    </dgm:pt>
+    <dgm:pt modelId="{04C1857B-A0FD-4099-A17B-3FDE6F932D4F}" type="sibTrans" cxnId="{F18066D4-6A13-46C2-B18C-B61313F1AD31}">
+      <dgm:prSet/>
+      <dgm:spPr/>
+      <dgm:t>
+        <a:bodyPr/>
+        <a:lstStyle/>
+        <a:p>
+          <a:endParaRPr lang="es-CL"/>
+        </a:p>
+      </dgm:t>
     </dgm:pt>
     <dgm:pt modelId="{6E1E561E-88C1-49C6-A3F7-DE4B9AD43273}" type="pres">
       <dgm:prSet presAssocID="{BE45140C-C326-4DAA-A267-498AD5117D68}" presName="linear" presStyleCnt="0">
@@ -1262,7 +1284,21 @@
     </dgm:pt>
     <dgm:pt modelId="{3F97C059-D720-4D48-953F-B84D04D0BF79}" type="pres">
       <dgm:prSet presAssocID="{02A34BC0-F8BA-4A89-87A4-4F20079DFD06}" presName="img" presStyleLbl="fgImgPlace1" presStyleIdx="1" presStyleCnt="3"/>
-      <dgm:spPr/>
+      <dgm:spPr>
+        <a:blipFill>
+          <a:blip xmlns:r="http://schemas.openxmlformats.org/officeDocument/2006/relationships" r:embed="rId2">
+            <a:extLst>
+              <a:ext uri="{28A0092B-C50C-407E-A947-70E740481C1C}">
+                <a14:useLocalDpi xmlns:a14="http://schemas.microsoft.com/office/drawing/2010/main" val="0"/>
+              </a:ext>
+            </a:extLst>
+          </a:blip>
+          <a:srcRect/>
+          <a:stretch>
+            <a:fillRect t="-75000" b="-75000"/>
+          </a:stretch>
+        </a:blipFill>
+      </dgm:spPr>
     </dgm:pt>
     <dgm:pt modelId="{CFFDF23F-D296-4CDF-8EE4-8A672559E207}" type="pres">
       <dgm:prSet presAssocID="{02A34BC0-F8BA-4A89-87A4-4F20079DFD06}" presName="text" presStyleLbl="node1" presStyleIdx="1" presStyleCnt="3">
@@ -1304,26 +1340,26 @@
     <dgm:cxn modelId="{A6E20436-8EF1-4FFF-9C29-AC69BF1D5C4A}" type="presOf" srcId="{02A34BC0-F8BA-4A89-87A4-4F20079DFD06}" destId="{39AFE128-ACF6-44CA-B18B-64F5782CF210}" srcOrd="0" destOrd="0" presId="urn:microsoft.com/office/officeart/2005/8/layout/vList4"/>
     <dgm:cxn modelId="{484B8A37-0122-4FF5-93D2-4A15DF521A17}" srcId="{78BFB295-8F5D-4286-B72B-79142F8F0E13}" destId="{D868444B-AE34-4422-A6A5-1F7D392D0C20}" srcOrd="0" destOrd="0" parTransId="{7DB88D83-6C3A-48C1-8CAD-0D11C3BEC35C}" sibTransId="{74B9B1A5-94EB-40A9-BFF2-678501068FB8}"/>
     <dgm:cxn modelId="{040FC75B-63D6-4205-A996-7A824AA266CE}" type="presOf" srcId="{A2BD12B5-7AB5-4859-B57E-1E77C0ED35DF}" destId="{0E12AD21-08CC-4736-A269-DD5234F9D874}" srcOrd="1" destOrd="1" presId="urn:microsoft.com/office/officeart/2005/8/layout/vList4"/>
-    <dgm:cxn modelId="{22F3405C-AB8E-4AC3-A83C-C551BA0831ED}" type="presOf" srcId="{55A2A9EB-4C26-43C3-B721-D475B10BC39B}" destId="{39AFE128-ACF6-44CA-B18B-64F5782CF210}" srcOrd="0" destOrd="2" presId="urn:microsoft.com/office/officeart/2005/8/layout/vList4"/>
     <dgm:cxn modelId="{7E8FC05E-FE02-4336-B1F8-3EAA05519A49}" type="presOf" srcId="{D868444B-AE34-4422-A6A5-1F7D392D0C20}" destId="{54FC4CB6-0791-48D3-B2C5-2E99B8AFCFF7}" srcOrd="0" destOrd="1" presId="urn:microsoft.com/office/officeart/2005/8/layout/vList4"/>
     <dgm:cxn modelId="{4FE7AF63-70AC-4ED4-8BFB-DCB2408F3318}" srcId="{BE45140C-C326-4DAA-A267-498AD5117D68}" destId="{99FF0D0F-282A-4030-9AF5-3B7621881539}" srcOrd="2" destOrd="0" parTransId="{A86F315C-C500-49D7-B443-1D58BD48589A}" sibTransId="{1CCC8D2D-CD28-4814-B055-28ABD65CA276}"/>
+    <dgm:cxn modelId="{F507E750-1488-4457-AE57-51F88C87BD16}" type="presOf" srcId="{042CE47C-DE4F-4534-9D6F-3A0CF95D58A5}" destId="{CFFDF23F-D296-4CDF-8EE4-8A672559E207}" srcOrd="1" destOrd="2" presId="urn:microsoft.com/office/officeart/2005/8/layout/vList4"/>
     <dgm:cxn modelId="{3F2A6752-A5BB-4F63-B720-93C45E0B4F56}" type="presOf" srcId="{D546635F-000B-49DF-BB26-293CCA777400}" destId="{F36F4ED1-B414-46B8-A8C5-C0FB11F5CFBC}" srcOrd="0" destOrd="2" presId="urn:microsoft.com/office/officeart/2005/8/layout/vList4"/>
-    <dgm:cxn modelId="{DC02AD53-682D-464B-9D09-C1B6DCD5AFB0}" type="presOf" srcId="{55A2A9EB-4C26-43C3-B721-D475B10BC39B}" destId="{CFFDF23F-D296-4CDF-8EE4-8A672559E207}" srcOrd="1" destOrd="2" presId="urn:microsoft.com/office/officeart/2005/8/layout/vList4"/>
     <dgm:cxn modelId="{0E2AE979-A66C-4CEC-BFF4-5B28BB7CD9EA}" srcId="{BE45140C-C326-4DAA-A267-498AD5117D68}" destId="{02A34BC0-F8BA-4A89-87A4-4F20079DFD06}" srcOrd="1" destOrd="0" parTransId="{9ADB496F-2DB6-4F16-8C91-2EB9CDF5F2F2}" sibTransId="{44AB630E-CD8B-4223-9F51-5EEE4E054B0A}"/>
     <dgm:cxn modelId="{2AD07198-D472-4B98-B6D5-5A730374E9A2}" srcId="{BE45140C-C326-4DAA-A267-498AD5117D68}" destId="{78BFB295-8F5D-4286-B72B-79142F8F0E13}" srcOrd="0" destOrd="0" parTransId="{F1885FAB-61EC-4F80-98D0-72360031AF9F}" sibTransId="{E88D0928-51D4-4670-8963-60ABBB193E13}"/>
     <dgm:cxn modelId="{FBEF4C9A-E5D4-462C-B35F-96C87426BEAB}" type="presOf" srcId="{A2BD12B5-7AB5-4859-B57E-1E77C0ED35DF}" destId="{F36F4ED1-B414-46B8-A8C5-C0FB11F5CFBC}" srcOrd="0" destOrd="1" presId="urn:microsoft.com/office/officeart/2005/8/layout/vList4"/>
     <dgm:cxn modelId="{690A389C-25C1-485B-88F9-437236A47744}" type="presOf" srcId="{BE45140C-C326-4DAA-A267-498AD5117D68}" destId="{6E1E561E-88C1-49C6-A3F7-DE4B9AD43273}" srcOrd="0" destOrd="0" presId="urn:microsoft.com/office/officeart/2005/8/layout/vList4"/>
     <dgm:cxn modelId="{6371ED9D-4AE7-44F3-8BCE-C936BF4BA99F}" type="presOf" srcId="{62F1AA66-C25A-4E90-9F94-A2481F187857}" destId="{54FC4CB6-0791-48D3-B2C5-2E99B8AFCFF7}" srcOrd="0" destOrd="2" presId="urn:microsoft.com/office/officeart/2005/8/layout/vList4"/>
     <dgm:cxn modelId="{ECFD91A4-F44F-4C84-8B25-37DA0B249A1F}" type="presOf" srcId="{78BFB295-8F5D-4286-B72B-79142F8F0E13}" destId="{52D125D2-FCA7-4A2D-AB39-B6BD54F251F2}" srcOrd="1" destOrd="0" presId="urn:microsoft.com/office/officeart/2005/8/layout/vList4"/>
+    <dgm:cxn modelId="{9F2D15B1-6569-45E4-BB52-DA1C914D9BEB}" type="presOf" srcId="{042CE47C-DE4F-4534-9D6F-3A0CF95D58A5}" destId="{39AFE128-ACF6-44CA-B18B-64F5782CF210}" srcOrd="0" destOrd="2" presId="urn:microsoft.com/office/officeart/2005/8/layout/vList4"/>
     <dgm:cxn modelId="{67DE09B5-392E-4661-A7AE-A0572D63DA68}" type="presOf" srcId="{99FF0D0F-282A-4030-9AF5-3B7621881539}" destId="{0E12AD21-08CC-4736-A269-DD5234F9D874}" srcOrd="1" destOrd="0" presId="urn:microsoft.com/office/officeart/2005/8/layout/vList4"/>
     <dgm:cxn modelId="{778F2DBC-81F3-476D-BD99-784E4F7153C8}" srcId="{02A34BC0-F8BA-4A89-87A4-4F20079DFD06}" destId="{EA3B2395-55AF-495E-9D6B-329D2886612F}" srcOrd="0" destOrd="0" parTransId="{01DA10B6-3F7A-4C8A-AACD-F605EE6CCF20}" sibTransId="{11A4E056-7834-4F82-8A9C-B8EA31F159E3}"/>
     <dgm:cxn modelId="{771AC4C3-43B6-4708-AF74-1C09D131840F}" type="presOf" srcId="{62F1AA66-C25A-4E90-9F94-A2481F187857}" destId="{52D125D2-FCA7-4A2D-AB39-B6BD54F251F2}" srcOrd="1" destOrd="2" presId="urn:microsoft.com/office/officeart/2005/8/layout/vList4"/>
     <dgm:cxn modelId="{24A7E5C3-B54B-4DF2-8B73-0A88F3EB4070}" srcId="{78BFB295-8F5D-4286-B72B-79142F8F0E13}" destId="{62F1AA66-C25A-4E90-9F94-A2481F187857}" srcOrd="1" destOrd="0" parTransId="{7F4727AC-1BDA-4A7C-9217-23F0312BC14B}" sibTransId="{C526E7B5-A8A2-4E42-843E-203585FE8244}"/>
     <dgm:cxn modelId="{FE5360C5-555C-42B2-9E63-16D2D46F21B1}" type="presOf" srcId="{D868444B-AE34-4422-A6A5-1F7D392D0C20}" destId="{52D125D2-FCA7-4A2D-AB39-B6BD54F251F2}" srcOrd="1" destOrd="1" presId="urn:microsoft.com/office/officeart/2005/8/layout/vList4"/>
     <dgm:cxn modelId="{B0C181C9-77EB-4775-B9E6-C6CBDA60E6EB}" type="presOf" srcId="{EA3B2395-55AF-495E-9D6B-329D2886612F}" destId="{CFFDF23F-D296-4CDF-8EE4-8A672559E207}" srcOrd="1" destOrd="1" presId="urn:microsoft.com/office/officeart/2005/8/layout/vList4"/>
-    <dgm:cxn modelId="{ECED70CB-7A25-48F8-9E03-51596FB1E92C}" srcId="{02A34BC0-F8BA-4A89-87A4-4F20079DFD06}" destId="{55A2A9EB-4C26-43C3-B721-D475B10BC39B}" srcOrd="1" destOrd="0" parTransId="{B8424EB2-FFE7-4867-9D5A-EE0D46E8AAFE}" sibTransId="{4EF4588A-187C-4393-9DFC-C6D80B20E995}"/>
     <dgm:cxn modelId="{D1C04ECF-982A-425F-B2B1-9CF15BCEB83B}" type="presOf" srcId="{D546635F-000B-49DF-BB26-293CCA777400}" destId="{0E12AD21-08CC-4736-A269-DD5234F9D874}" srcOrd="1" destOrd="2" presId="urn:microsoft.com/office/officeart/2005/8/layout/vList4"/>
     <dgm:cxn modelId="{22A4C7D2-C14A-4622-8C4E-3FE51F50DCC3}" type="presOf" srcId="{02A34BC0-F8BA-4A89-87A4-4F20079DFD06}" destId="{CFFDF23F-D296-4CDF-8EE4-8A672559E207}" srcOrd="1" destOrd="0" presId="urn:microsoft.com/office/officeart/2005/8/layout/vList4"/>
+    <dgm:cxn modelId="{F18066D4-6A13-46C2-B18C-B61313F1AD31}" srcId="{02A34BC0-F8BA-4A89-87A4-4F20079DFD06}" destId="{042CE47C-DE4F-4534-9D6F-3A0CF95D58A5}" srcOrd="1" destOrd="0" parTransId="{F2A7D6BC-F441-4EC5-A51F-57C79CEBBCA8}" sibTransId="{04C1857B-A0FD-4099-A17B-3FDE6F932D4F}"/>
     <dgm:cxn modelId="{AC0A7FF3-EEC4-470A-823E-BF7AF1556A99}" srcId="{99FF0D0F-282A-4030-9AF5-3B7621881539}" destId="{D546635F-000B-49DF-BB26-293CCA777400}" srcOrd="1" destOrd="0" parTransId="{5437D343-BECF-4620-B6C7-7088D8BBD91B}" sibTransId="{B01A0825-9EDF-4B9A-B345-1B486D914AD4}"/>
     <dgm:cxn modelId="{7ABE08FD-4ED4-44FB-BFBA-794B6C5FA813}" type="presOf" srcId="{EA3B2395-55AF-495E-9D6B-329D2886612F}" destId="{39AFE128-ACF6-44CA-B18B-64F5782CF210}" srcOrd="0" destOrd="1" presId="urn:microsoft.com/office/officeart/2005/8/layout/vList4"/>
     <dgm:cxn modelId="{DA463EE6-78DB-4E59-8099-EBA029F401B0}" type="presParOf" srcId="{6E1E561E-88C1-49C6-A3F7-DE4B9AD43273}" destId="{F70979D0-5925-4EC3-AD84-986E0EC7B0D8}" srcOrd="0" destOrd="0" presId="urn:microsoft.com/office/officeart/2005/8/layout/vList4"/>
@@ -1438,12 +1474,12 @@
         </a:fontRef>
       </dsp:style>
       <dsp:txBody>
-        <a:bodyPr spcFirstLastPara="0" vert="horz" wrap="square" lIns="99060" tIns="99060" rIns="99060" bIns="99060" numCol="1" spcCol="1270" anchor="t" anchorCtr="0">
+        <a:bodyPr spcFirstLastPara="0" vert="horz" wrap="square" lIns="91440" tIns="91440" rIns="91440" bIns="91440" numCol="1" spcCol="1270" anchor="t" anchorCtr="0">
           <a:noAutofit/>
         </a:bodyPr>
         <a:lstStyle/>
         <a:p>
-          <a:pPr marL="0" lvl="0" indent="0" algn="l" defTabSz="1155700">
+          <a:pPr marL="0" lvl="0" indent="0" algn="l" defTabSz="1066800">
             <a:lnSpc>
               <a:spcPct val="90000"/>
             </a:lnSpc>
@@ -1456,13 +1492,13 @@
             <a:buNone/>
           </a:pPr>
           <a:r>
-            <a:rPr lang="es-MX" sz="2600" kern="1200" dirty="0"/>
+            <a:rPr lang="es-MX" sz="2400" kern="1200" dirty="0"/>
             <a:t>Benjamín Alejandro Bravo Rivadeneira</a:t>
           </a:r>
-          <a:endParaRPr lang="es-CL" sz="2600" kern="1200" dirty="0"/>
+          <a:endParaRPr lang="es-CL" sz="2400" kern="1200" dirty="0"/>
         </a:p>
         <a:p>
-          <a:pPr marL="228600" lvl="1" indent="-228600" algn="l" defTabSz="889000">
+          <a:pPr marL="171450" lvl="1" indent="-171450" algn="l" defTabSz="844550">
             <a:lnSpc>
               <a:spcPct val="90000"/>
             </a:lnSpc>
@@ -1475,13 +1511,17 @@
             <a:buChar char="•"/>
           </a:pPr>
           <a:r>
-            <a:rPr lang="es-MX" sz="2000" kern="1200" dirty="0"/>
-            <a:t>Gestor de proyectos y Líder del proyecto</a:t>
+            <a:rPr lang="es-MX" sz="1900" kern="1200" dirty="0"/>
+            <a:t>Líder del proyecto y programado .</a:t>
           </a:r>
-          <a:endParaRPr lang="es-CL" sz="2000" kern="1200" dirty="0"/>
+          <a:r>
+            <a:rPr lang="es-MX" sz="1900" kern="1200" dirty="0" err="1"/>
+            <a:t>js</a:t>
+          </a:r>
+          <a:endParaRPr lang="es-CL" sz="1900" kern="1200" dirty="0"/>
         </a:p>
         <a:p>
-          <a:pPr marL="228600" lvl="1" indent="-228600" algn="l" defTabSz="889000">
+          <a:pPr marL="171450" lvl="1" indent="-171450" algn="l" defTabSz="844550">
             <a:lnSpc>
               <a:spcPct val="90000"/>
             </a:lnSpc>
@@ -1494,10 +1534,14 @@
             <a:buChar char="•"/>
           </a:pPr>
           <a:r>
-            <a:rPr lang="es-MX" sz="2000" kern="1200" dirty="0"/>
-            <a:t>Tener los documentos, ayudar y guiar al equipo</a:t>
+            <a:rPr lang="es-MX" sz="1900" kern="1200" dirty="0"/>
+            <a:t>Tener los documentos y programar validaciones en .</a:t>
           </a:r>
-          <a:endParaRPr lang="es-CL" sz="2000" kern="1200" dirty="0"/>
+          <a:r>
+            <a:rPr lang="es-MX" sz="1900" kern="1200" dirty="0" err="1"/>
+            <a:t>js</a:t>
+          </a:r>
+          <a:endParaRPr lang="es-CL" sz="1900" kern="1200" dirty="0"/>
         </a:p>
       </dsp:txBody>
       <dsp:txXfrm>
@@ -1636,12 +1680,12 @@
         </a:fontRef>
       </dsp:style>
       <dsp:txBody>
-        <a:bodyPr spcFirstLastPara="0" vert="horz" wrap="square" lIns="99060" tIns="99060" rIns="99060" bIns="99060" numCol="1" spcCol="1270" anchor="t" anchorCtr="0">
+        <a:bodyPr spcFirstLastPara="0" vert="horz" wrap="square" lIns="91440" tIns="91440" rIns="91440" bIns="91440" numCol="1" spcCol="1270" anchor="t" anchorCtr="0">
           <a:noAutofit/>
         </a:bodyPr>
         <a:lstStyle/>
         <a:p>
-          <a:pPr marL="0" lvl="0" indent="0" algn="l" defTabSz="1155700">
+          <a:pPr marL="0" lvl="0" indent="0" algn="l" defTabSz="1066800">
             <a:lnSpc>
               <a:spcPct val="90000"/>
             </a:lnSpc>
@@ -1654,13 +1698,13 @@
             <a:buNone/>
           </a:pPr>
           <a:r>
-            <a:rPr lang="es-MX" sz="2600" kern="1200"/>
-            <a:t>Nombre de estudiante</a:t>
+            <a:rPr lang="es-MX" sz="2400" kern="1200" dirty="0"/>
+            <a:t>Benjamín Ignacio Vargas Díaz</a:t>
           </a:r>
-          <a:endParaRPr lang="es-CL" sz="2600" kern="1200" dirty="0"/>
+          <a:endParaRPr lang="es-CL" sz="2400" kern="1200" dirty="0"/>
         </a:p>
         <a:p>
-          <a:pPr marL="228600" lvl="1" indent="-228600" algn="l" defTabSz="889000">
+          <a:pPr marL="171450" lvl="1" indent="-171450" algn="l" defTabSz="844550">
             <a:lnSpc>
               <a:spcPct val="90000"/>
             </a:lnSpc>
@@ -1673,13 +1717,13 @@
             <a:buChar char="•"/>
           </a:pPr>
           <a:r>
-            <a:rPr lang="es-MX" sz="2000" kern="1200" dirty="0"/>
-            <a:t>Cargo</a:t>
+            <a:rPr lang="es-MX" sz="1900" kern="1200" dirty="0"/>
+            <a:t>Gestor de base de datos y desarrollador</a:t>
           </a:r>
-          <a:endParaRPr lang="es-CL" sz="2000" kern="1200" dirty="0"/>
+          <a:endParaRPr lang="es-CL" sz="1900" kern="1200" dirty="0"/>
         </a:p>
         <a:p>
-          <a:pPr marL="228600" lvl="1" indent="-228600" algn="l" defTabSz="889000">
+          <a:pPr marL="171450" lvl="1" indent="-171450" algn="l" defTabSz="844550">
             <a:lnSpc>
               <a:spcPct val="90000"/>
             </a:lnSpc>
@@ -1692,10 +1736,10 @@
             <a:buChar char="•"/>
           </a:pPr>
           <a:r>
-            <a:rPr lang="es-MX" sz="2000" kern="1200" dirty="0"/>
-            <a:t>Funciones desempeñadas</a:t>
+            <a:rPr lang="es-MX" sz="1900" kern="1200" dirty="0"/>
+            <a:t>Desarrollador y levantamiento del proyecto en la nube</a:t>
           </a:r>
-          <a:endParaRPr lang="es-CL" sz="2000" kern="1200" dirty="0"/>
+          <a:endParaRPr lang="es-CL" sz="1900" kern="1200" dirty="0"/>
         </a:p>
       </dsp:txBody>
       <dsp:txXfrm>
@@ -1718,15 +1762,19 @@
             <a:gd name="adj" fmla="val 10000"/>
           </a:avLst>
         </a:prstGeom>
-        <a:solidFill>
-          <a:schemeClr val="accent5">
-            <a:tint val="50000"/>
-            <a:hueOff val="0"/>
-            <a:satOff val="0"/>
-            <a:lumOff val="0"/>
-            <a:alphaOff val="0"/>
-          </a:schemeClr>
-        </a:solidFill>
+        <a:blipFill>
+          <a:blip xmlns:r="http://schemas.openxmlformats.org/officeDocument/2006/relationships" r:embed="rId2">
+            <a:extLst>
+              <a:ext uri="{28A0092B-C50C-407E-A947-70E740481C1C}">
+                <a14:useLocalDpi xmlns:a14="http://schemas.microsoft.com/office/drawing/2010/main" val="0"/>
+              </a:ext>
+            </a:extLst>
+          </a:blip>
+          <a:srcRect/>
+          <a:stretch>
+            <a:fillRect t="-75000" b="-75000"/>
+          </a:stretch>
+        </a:blipFill>
         <a:ln>
           <a:noFill/>
         </a:ln>
@@ -1830,12 +1878,12 @@
         </a:fontRef>
       </dsp:style>
       <dsp:txBody>
-        <a:bodyPr spcFirstLastPara="0" vert="horz" wrap="square" lIns="99060" tIns="99060" rIns="99060" bIns="99060" numCol="1" spcCol="1270" anchor="t" anchorCtr="0">
+        <a:bodyPr spcFirstLastPara="0" vert="horz" wrap="square" lIns="91440" tIns="91440" rIns="91440" bIns="91440" numCol="1" spcCol="1270" anchor="t" anchorCtr="0">
           <a:noAutofit/>
         </a:bodyPr>
         <a:lstStyle/>
         <a:p>
-          <a:pPr marL="0" lvl="0" indent="0" algn="l" defTabSz="1155700">
+          <a:pPr marL="0" lvl="0" indent="0" algn="l" defTabSz="1066800">
             <a:lnSpc>
               <a:spcPct val="90000"/>
             </a:lnSpc>
@@ -1848,13 +1896,13 @@
             <a:buNone/>
           </a:pPr>
           <a:r>
-            <a:rPr lang="es-MX" sz="2600" kern="1200" dirty="0"/>
+            <a:rPr lang="es-MX" sz="2400" kern="1200" dirty="0"/>
             <a:t>Nombre de estudiante</a:t>
           </a:r>
-          <a:endParaRPr lang="es-CL" sz="2600" kern="1200" dirty="0"/>
+          <a:endParaRPr lang="es-CL" sz="2400" kern="1200" dirty="0"/>
         </a:p>
         <a:p>
-          <a:pPr marL="228600" lvl="1" indent="-228600" algn="l" defTabSz="889000">
+          <a:pPr marL="171450" lvl="1" indent="-171450" algn="l" defTabSz="844550">
             <a:lnSpc>
               <a:spcPct val="90000"/>
             </a:lnSpc>
@@ -1867,13 +1915,13 @@
             <a:buChar char="•"/>
           </a:pPr>
           <a:r>
-            <a:rPr lang="es-MX" sz="2000" kern="1200" dirty="0"/>
+            <a:rPr lang="es-MX" sz="1900" kern="1200" dirty="0"/>
             <a:t>Cargo</a:t>
           </a:r>
-          <a:endParaRPr lang="es-CL" sz="2000" kern="1200" dirty="0"/>
+          <a:endParaRPr lang="es-CL" sz="1900" kern="1200" dirty="0"/>
         </a:p>
         <a:p>
-          <a:pPr marL="228600" lvl="1" indent="-228600" algn="l" defTabSz="889000">
+          <a:pPr marL="171450" lvl="1" indent="-171450" algn="l" defTabSz="844550">
             <a:lnSpc>
               <a:spcPct val="90000"/>
             </a:lnSpc>
@@ -1886,10 +1934,10 @@
             <a:buChar char="•"/>
           </a:pPr>
           <a:r>
-            <a:rPr lang="es-MX" sz="2000" kern="1200" dirty="0"/>
+            <a:rPr lang="es-MX" sz="1900" kern="1200" dirty="0"/>
             <a:t>Funciones desempeñadas</a:t>
           </a:r>
-          <a:endParaRPr lang="es-CL" sz="2000" kern="1200" dirty="0"/>
+          <a:endParaRPr lang="es-CL" sz="1900" kern="1200" dirty="0"/>
         </a:p>
       </dsp:txBody>
       <dsp:txXfrm>
@@ -7391,7 +7439,7 @@
           <p:nvPr>
             <p:extLst>
               <p:ext uri="{D42A27DB-BD31-4B8C-83A1-F6EECF244321}">
-                <p14:modId xmlns:p14="http://schemas.microsoft.com/office/powerpoint/2010/main" val="972565903"/>
+                <p14:modId xmlns:p14="http://schemas.microsoft.com/office/powerpoint/2010/main" val="1453126575"/>
               </p:ext>
             </p:extLst>
           </p:nvPr>
@@ -8513,6 +8561,14 @@
           <a:lstStyle/>
           <a:p>
             <a:pPr algn="ctr"/>
+            <a:r>
+              <a:rPr lang="es-MX" dirty="0"/>
+              <a:t>El objetivo general es: Que una persona con cual sea la discapacidad dentro de la 3 que se comentaron al inicio (que son audición, visual y motora) pueda realizar una compra online autónomamente, específicamente en el proceso de navegación. </a:t>
+            </a:r>
+            <a:endParaRPr lang="es-CL" dirty="0"/>
+          </a:p>
+          <a:p>
+            <a:pPr algn="ctr"/>
             <a:endParaRPr lang="es-CL" dirty="0"/>
           </a:p>
         </p:txBody>
@@ -8559,9 +8615,29 @@
             <a:pPr algn="ctr"/>
             <a:r>
               <a:rPr lang="es-MX" dirty="0"/>
-              <a:t>Descripción</a:t>
+              <a:t>Objetivos Específicos son los siguientes: </a:t>
             </a:r>
-            <a:endParaRPr lang="es-CL" dirty="0"/>
+          </a:p>
+          <a:p>
+            <a:pPr algn="ctr"/>
+            <a:r>
+              <a:rPr lang="es-CL" dirty="0"/>
+              <a:t>1- Permite a una persona con discapacidad motora navegar mediante comandos de voz.</a:t>
+            </a:r>
+          </a:p>
+          <a:p>
+            <a:pPr algn="ctr"/>
+            <a:r>
+              <a:rPr lang="es-CL" dirty="0"/>
+              <a:t>2- Permite a una persona con discapacidad visual del -15% se implemento una lupa para aumentar visualmente la zona donde ubica el curso. </a:t>
+            </a:r>
+          </a:p>
+          <a:p>
+            <a:pPr algn="ctr"/>
+            <a:r>
+              <a:rPr lang="es-CL" dirty="0"/>
+              <a:t>3- Permite que una persona sorda pueda navegar con totalidad en el apoyo visual y por comandos de voz.</a:t>
+            </a:r>
           </a:p>
         </p:txBody>
       </p:sp>
@@ -8782,7 +8858,7 @@
         <p:spPr>
           <a:xfrm>
             <a:off x="136188" y="368928"/>
-            <a:ext cx="12191999" cy="369332"/>
+            <a:ext cx="12191999" cy="646331"/>
           </a:xfrm>
           <a:prstGeom prst="rect">
             <a:avLst/>
@@ -8803,8 +8879,55 @@
                   </a:schemeClr>
                 </a:solidFill>
               </a:rPr>
-              <a:t>PROYECTO “NOMBRE DEL PROYECTO”</a:t>
+              <a:t>PROYECTO  “</a:t>
             </a:r>
+            <a:r>
+              <a:rPr lang="es-MX" sz="1800" dirty="0"/>
+              <a:t>I</a:t>
+            </a:r>
+            <a:r>
+              <a:rPr lang="es-CL" sz="1800" i="0" dirty="0" err="1">
+                <a:effectLst/>
+              </a:rPr>
+              <a:t>nclushop</a:t>
+            </a:r>
+            <a:r>
+              <a:rPr lang="es-CL" sz="1800" i="0" dirty="0">
+                <a:effectLst/>
+              </a:rPr>
+              <a:t> : Herramientas para un E-</a:t>
+            </a:r>
+            <a:r>
+              <a:rPr lang="es-CL" sz="1800" i="0" dirty="0" err="1">
+                <a:effectLst/>
+              </a:rPr>
+              <a:t>commerce</a:t>
+            </a:r>
+            <a:r>
+              <a:rPr lang="es-CL" sz="1800" i="0" dirty="0">
+                <a:effectLst/>
+              </a:rPr>
+              <a:t> inclusivo</a:t>
+            </a:r>
+            <a:r>
+              <a:rPr lang="es-MX" dirty="0">
+                <a:solidFill>
+                  <a:schemeClr val="bg2">
+                    <a:lumMod val="50000"/>
+                  </a:schemeClr>
+                </a:solidFill>
+              </a:rPr>
+              <a:t>”</a:t>
+            </a:r>
+          </a:p>
+          <a:p>
+            <a:endParaRPr lang="es-MX" dirty="0">
+              <a:solidFill>
+                <a:schemeClr val="bg2">
+                  <a:lumMod val="50000"/>
+                </a:schemeClr>
+              </a:solidFill>
+            </a:endParaRPr>
           </a:p>
         </p:txBody>
       </p:sp>
@@ -8822,7 +8945,7 @@
         </p:nvSpPr>
         <p:spPr>
           <a:xfrm>
-            <a:off x="0" y="1432655"/>
+            <a:off x="-71717" y="1176637"/>
             <a:ext cx="12191999" cy="646331"/>
           </a:xfrm>
           <a:prstGeom prst="rect">
@@ -8912,6 +9035,74 @@
           </a:fontRef>
         </p:style>
       </p:cxnSp>
+      <p:sp>
+        <p:nvSpPr>
+          <p:cNvPr id="8" name="CuadroTexto 7">
+            <a:extLst>
+              <a:ext uri="{FF2B5EF4-FFF2-40B4-BE49-F238E27FC236}">
+                <a16:creationId xmlns:a16="http://schemas.microsoft.com/office/drawing/2014/main" id="{2F6E699B-3465-4253-8BD9-5E7066AB0AC4}"/>
+              </a:ext>
+            </a:extLst>
+          </p:cNvPr>
+          <p:cNvSpPr txBox="1"/>
+          <p:nvPr/>
+        </p:nvSpPr>
+        <p:spPr>
+          <a:xfrm>
+            <a:off x="136187" y="1892968"/>
+            <a:ext cx="11526423" cy="2585323"/>
+          </a:xfrm>
+          <a:prstGeom prst="rect">
+            <a:avLst/>
+          </a:prstGeom>
+          <a:noFill/>
+        </p:spPr>
+        <p:txBody>
+          <a:bodyPr wrap="square">
+            <a:spAutoFit/>
+          </a:bodyPr>
+          <a:lstStyle/>
+          <a:p>
+            <a:pPr algn="just"/>
+            <a:r>
+              <a:rPr lang="es-MX" dirty="0"/>
+              <a:t>El alcance del proyecto se mide dentro de los 3 pilares que nos centramos son usabilidad, accesibilidad y intuitiva, lo anteriormente mencionado se encuentra englobados en I.S.O 9241 cada uno de los soportes centrales anteriormente mencionados y se encuentran englobados en usuario con de las discapacidades anteriormente mencionadas comienzo (que son auditivas, visuales y motoras).</a:t>
+            </a:r>
+          </a:p>
+          <a:p>
+            <a:pPr algn="just"/>
+            <a:endParaRPr lang="es-MX" sz="1800" dirty="0"/>
+          </a:p>
+          <a:p>
+            <a:pPr algn="just"/>
+            <a:r>
+              <a:rPr lang="es-MX" dirty="0"/>
+              <a:t>Las limitaciones que se vieron y que afectaron el progreso del proyecto se vieron en temas de habilidades descendidas en el caso  de cada uno de los integrantes ejemplo: Benjamín Bravo le daba miedo programar en .JS ya que le costaba y en la actualidad  a perdido el miedo mediante la práctica e implementación de </a:t>
+            </a:r>
+            <a:r>
+              <a:rPr lang="es-MX" dirty="0" err="1"/>
+              <a:t>blanches</a:t>
+            </a:r>
+            <a:r>
+              <a:rPr lang="es-MX" dirty="0"/>
+              <a:t> (ramas de </a:t>
+            </a:r>
+            <a:r>
+              <a:rPr lang="es-MX" dirty="0" err="1"/>
+              <a:t>GitHup</a:t>
+            </a:r>
+            <a:r>
+              <a:rPr lang="es-MX" dirty="0"/>
+              <a:t>).</a:t>
+            </a:r>
+            <a:endParaRPr lang="es-MX" sz="1800" dirty="0"/>
+          </a:p>
+          <a:p>
+            <a:pPr algn="just"/>
+            <a:endParaRPr lang="es-CL" sz="1800" dirty="0"/>
+          </a:p>
+        </p:txBody>
+      </p:sp>
     </p:spTree>
     <p:extLst>
       <p:ext uri="{BB962C8B-B14F-4D97-AF65-F5344CB8AC3E}">
@@ -9007,7 +9198,7 @@
         <p:spPr>
           <a:xfrm>
             <a:off x="136188" y="368928"/>
-            <a:ext cx="12191999" cy="369332"/>
+            <a:ext cx="12191999" cy="646331"/>
           </a:xfrm>
           <a:prstGeom prst="rect">
             <a:avLst/>
@@ -9028,8 +9219,55 @@
                   </a:schemeClr>
                 </a:solidFill>
               </a:rPr>
-              <a:t>PROYECTO “NOMBRE DEL PROYECTO”</a:t>
+              <a:t>PROYECTO  “</a:t>
             </a:r>
+            <a:r>
+              <a:rPr lang="es-MX" sz="1800" dirty="0"/>
+              <a:t>I</a:t>
+            </a:r>
+            <a:r>
+              <a:rPr lang="es-CL" sz="1800" i="0" dirty="0" err="1">
+                <a:effectLst/>
+              </a:rPr>
+              <a:t>nclushop</a:t>
+            </a:r>
+            <a:r>
+              <a:rPr lang="es-CL" sz="1800" i="0" dirty="0">
+                <a:effectLst/>
+              </a:rPr>
+              <a:t> : Herramientas para un E-</a:t>
+            </a:r>
+            <a:r>
+              <a:rPr lang="es-CL" sz="1800" i="0" dirty="0" err="1">
+                <a:effectLst/>
+              </a:rPr>
+              <a:t>commerce</a:t>
+            </a:r>
+            <a:r>
+              <a:rPr lang="es-CL" sz="1800" i="0" dirty="0">
+                <a:effectLst/>
+              </a:rPr>
+              <a:t> inclusivo</a:t>
+            </a:r>
+            <a:r>
+              <a:rPr lang="es-MX" dirty="0">
+                <a:solidFill>
+                  <a:schemeClr val="bg2">
+                    <a:lumMod val="50000"/>
+                  </a:schemeClr>
+                </a:solidFill>
+              </a:rPr>
+              <a:t>”</a:t>
+            </a:r>
+          </a:p>
+          <a:p>
+            <a:endParaRPr lang="es-MX" dirty="0">
+              <a:solidFill>
+                <a:schemeClr val="bg2">
+                  <a:lumMod val="50000"/>
+                </a:schemeClr>
+              </a:solidFill>
+            </a:endParaRPr>
           </a:p>
         </p:txBody>
       </p:sp>
@@ -9138,6 +9376,75 @@
           </a:fontRef>
         </p:style>
       </p:cxnSp>
+      <p:sp>
+        <p:nvSpPr>
+          <p:cNvPr id="10" name="CuadroTexto 9">
+            <a:extLst>
+              <a:ext uri="{FF2B5EF4-FFF2-40B4-BE49-F238E27FC236}">
+                <a16:creationId xmlns:a16="http://schemas.microsoft.com/office/drawing/2014/main" id="{CBEB7D64-7F33-4663-A218-2DDB2FF4765A}"/>
+              </a:ext>
+            </a:extLst>
+          </p:cNvPr>
+          <p:cNvSpPr txBox="1"/>
+          <p:nvPr/>
+        </p:nvSpPr>
+        <p:spPr>
+          <a:xfrm>
+            <a:off x="136188" y="2129655"/>
+            <a:ext cx="11777370" cy="1477328"/>
+          </a:xfrm>
+          <a:prstGeom prst="rect">
+            <a:avLst/>
+          </a:prstGeom>
+          <a:noFill/>
+        </p:spPr>
+        <p:txBody>
+          <a:bodyPr wrap="square">
+            <a:spAutoFit/>
+          </a:bodyPr>
+          <a:lstStyle/>
+          <a:p>
+            <a:pPr algn="just"/>
+            <a:r>
+              <a:rPr lang="es-MX" dirty="0"/>
+              <a:t>La metodología de trabajo seleccionada fue la llamada “SCRUM” en el marco de la filosofía o marco de trabajo “AGIL”, ya que permite ir con un seguimiento más controlado mediante las “</a:t>
+            </a:r>
+            <a:r>
+              <a:rPr lang="es-MX" dirty="0" err="1"/>
+              <a:t>Daily</a:t>
+            </a:r>
+            <a:r>
+              <a:rPr lang="es-MX" dirty="0"/>
+              <a:t>”, que en nuestro caso por el ritmo del proyecto generamos en total 3 “</a:t>
+            </a:r>
+            <a:r>
+              <a:rPr lang="es-MX" dirty="0" err="1"/>
+              <a:t>Daily</a:t>
+            </a:r>
+            <a:r>
+              <a:rPr lang="es-MX" dirty="0"/>
+              <a:t> ” por semana que contaban desde unos 15 minutos hasta 1 hora las cuales se usaba como recordatorio el “calendario de Google”, se usaba “</a:t>
+            </a:r>
+            <a:r>
+              <a:rPr lang="es-MX" dirty="0" err="1"/>
+              <a:t>Meet</a:t>
+            </a:r>
+            <a:r>
+              <a:rPr lang="es-MX" dirty="0"/>
+              <a:t> Google” para la comunicación online y además se realizaron  3 fases “</a:t>
+            </a:r>
+            <a:r>
+              <a:rPr lang="es-MX" dirty="0" err="1"/>
+              <a:t>Sprints</a:t>
+            </a:r>
+            <a:r>
+              <a:rPr lang="es-MX" dirty="0"/>
+              <a:t>” </a:t>
+            </a:r>
+            <a:endParaRPr lang="es-MX" sz="1800" dirty="0"/>
+          </a:p>
+        </p:txBody>
+      </p:sp>
     </p:spTree>
     <p:extLst>
       <p:ext uri="{BB962C8B-B14F-4D97-AF65-F5344CB8AC3E}">

--- a/Fase 3/Evidencias Grupales/Formato Presentación final.pptx
+++ b/Fase 3/Evidencias Grupales/Formato Presentación final.pptx
@@ -969,7 +969,7 @@
         <a:p>
           <a:r>
             <a:rPr lang="es-MX" dirty="0"/>
-            <a:t>Nombre de estudiante</a:t>
+            <a:t>Felipe Teodoro Muñoz González </a:t>
           </a:r>
           <a:endParaRPr lang="es-CL" dirty="0"/>
         </a:p>
@@ -1005,8 +1005,20 @@
         <a:lstStyle/>
         <a:p>
           <a:r>
+            <a:rPr lang="es-MX" dirty="0" err="1"/>
+            <a:t>Product</a:t>
+          </a:r>
+          <a:r>
             <a:rPr lang="es-MX" dirty="0"/>
-            <a:t>Cargo</a:t>
+            <a:t> </a:t>
+          </a:r>
+          <a:r>
+            <a:rPr lang="es-MX" dirty="0" err="1"/>
+            <a:t>Owner</a:t>
+          </a:r>
+          <a:r>
+            <a:rPr lang="es-MX" dirty="0"/>
+            <a:t> e Ingeniero de Interacción por Voz.}</a:t>
           </a:r>
           <a:endParaRPr lang="es-CL" dirty="0"/>
         </a:p>
@@ -1024,43 +1036,6 @@
       </dgm:t>
     </dgm:pt>
     <dgm:pt modelId="{AC7F7F07-A811-4CCD-BBFE-DAA4D1F5EE40}" type="parTrans" cxnId="{D5771F2D-99A4-4884-A896-FA1E2DEFDD88}">
-      <dgm:prSet/>
-      <dgm:spPr/>
-      <dgm:t>
-        <a:bodyPr/>
-        <a:lstStyle/>
-        <a:p>
-          <a:endParaRPr lang="es-CL"/>
-        </a:p>
-      </dgm:t>
-    </dgm:pt>
-    <dgm:pt modelId="{D546635F-000B-49DF-BB26-293CCA777400}">
-      <dgm:prSet phldrT="[Texto]"/>
-      <dgm:spPr/>
-      <dgm:t>
-        <a:bodyPr/>
-        <a:lstStyle/>
-        <a:p>
-          <a:r>
-            <a:rPr lang="es-MX" dirty="0"/>
-            <a:t>Funciones desempeñadas</a:t>
-          </a:r>
-          <a:endParaRPr lang="es-CL" dirty="0"/>
-        </a:p>
-      </dgm:t>
-    </dgm:pt>
-    <dgm:pt modelId="{B01A0825-9EDF-4B9A-B345-1B486D914AD4}" type="sibTrans" cxnId="{AC0A7FF3-EEC4-470A-823E-BF7AF1556A99}">
-      <dgm:prSet/>
-      <dgm:spPr/>
-      <dgm:t>
-        <a:bodyPr/>
-        <a:lstStyle/>
-        <a:p>
-          <a:endParaRPr lang="es-CL"/>
-        </a:p>
-      </dgm:t>
-    </dgm:pt>
-    <dgm:pt modelId="{5437D343-BECF-4620-B6C7-7088D8BBD91B}" type="parTrans" cxnId="{AC0A7FF3-EEC4-470A-823E-BF7AF1556A99}">
       <dgm:prSet/>
       <dgm:spPr/>
       <dgm:t>
@@ -1227,6 +1202,28 @@
         </a:p>
       </dgm:t>
     </dgm:pt>
+    <dgm:pt modelId="{615966B1-AC44-4287-8129-C435CDE001AB}">
+      <dgm:prSet phldrT="[Texto]"/>
+      <dgm:spPr/>
+      <dgm:t>
+        <a:bodyPr/>
+        <a:lstStyle/>
+        <a:p>
+          <a:r>
+            <a:rPr lang="es-CL" dirty="0"/>
+            <a:t>Coordinar e implementar nuevas funcionalidades, Implementar sistemas de navegación inclusivos.</a:t>
+          </a:r>
+        </a:p>
+      </dgm:t>
+    </dgm:pt>
+    <dgm:pt modelId="{27B11DD4-0DCC-490B-8EB5-CC85CC7B8231}" type="parTrans" cxnId="{FA4C0894-1234-450D-80E0-86CBEABEDE7C}">
+      <dgm:prSet/>
+      <dgm:spPr/>
+    </dgm:pt>
+    <dgm:pt modelId="{8C9BE87E-B214-4FF3-8713-4C7FFD90044C}" type="sibTrans" cxnId="{FA4C0894-1234-450D-80E0-86CBEABEDE7C}">
+      <dgm:prSet/>
+      <dgm:spPr/>
+    </dgm:pt>
     <dgm:pt modelId="{6E1E561E-88C1-49C6-A3F7-DE4B9AD43273}" type="pres">
       <dgm:prSet presAssocID="{BE45140C-C326-4DAA-A267-498AD5117D68}" presName="linear" presStyleCnt="0">
         <dgm:presLayoutVars>
@@ -1322,7 +1319,21 @@
     </dgm:pt>
     <dgm:pt modelId="{7C6A764B-C67C-494C-B90E-7B3C3DDE54A4}" type="pres">
       <dgm:prSet presAssocID="{99FF0D0F-282A-4030-9AF5-3B7621881539}" presName="img" presStyleLbl="fgImgPlace1" presStyleIdx="2" presStyleCnt="3"/>
-      <dgm:spPr/>
+      <dgm:spPr>
+        <a:blipFill>
+          <a:blip xmlns:r="http://schemas.openxmlformats.org/officeDocument/2006/relationships" r:embed="rId3">
+            <a:extLst>
+              <a:ext uri="{28A0092B-C50C-407E-A947-70E740481C1C}">
+                <a14:useLocalDpi xmlns:a14="http://schemas.microsoft.com/office/drawing/2010/main" val="0"/>
+              </a:ext>
+            </a:extLst>
+          </a:blip>
+          <a:srcRect/>
+          <a:stretch>
+            <a:fillRect t="-55000" b="-55000"/>
+          </a:stretch>
+        </a:blipFill>
+      </dgm:spPr>
     </dgm:pt>
     <dgm:pt modelId="{0E12AD21-08CC-4736-A269-DD5234F9D874}" type="pres">
       <dgm:prSet presAssocID="{99FF0D0F-282A-4030-9AF5-3B7621881539}" presName="text" presStyleLbl="node1" presStyleIdx="2" presStyleCnt="3">
@@ -1334,6 +1345,7 @@
     </dgm:pt>
   </dgm:ptLst>
   <dgm:cxnLst>
+    <dgm:cxn modelId="{6A51410A-C9A5-4AF8-B2DA-459C003E538A}" type="presOf" srcId="{615966B1-AC44-4287-8129-C435CDE001AB}" destId="{0E12AD21-08CC-4736-A269-DD5234F9D874}" srcOrd="1" destOrd="2" presId="urn:microsoft.com/office/officeart/2005/8/layout/vList4"/>
     <dgm:cxn modelId="{D2B94F0C-C779-4AC1-87E4-35116A3DED02}" type="presOf" srcId="{78BFB295-8F5D-4286-B72B-79142F8F0E13}" destId="{54FC4CB6-0791-48D3-B2C5-2E99B8AFCFF7}" srcOrd="0" destOrd="0" presId="urn:microsoft.com/office/officeart/2005/8/layout/vList4"/>
     <dgm:cxn modelId="{D5771F2D-99A4-4884-A896-FA1E2DEFDD88}" srcId="{99FF0D0F-282A-4030-9AF5-3B7621881539}" destId="{A2BD12B5-7AB5-4859-B57E-1E77C0ED35DF}" srcOrd="0" destOrd="0" parTransId="{AC7F7F07-A811-4CCD-BBFE-DAA4D1F5EE40}" sibTransId="{35EEEEB1-B116-40C6-8142-8F938AF38B0B}"/>
     <dgm:cxn modelId="{3A21ED2D-BFFE-4942-BD04-AB5B9DC419E5}" type="presOf" srcId="{99FF0D0F-282A-4030-9AF5-3B7621881539}" destId="{F36F4ED1-B414-46B8-A8C5-C0FB11F5CFBC}" srcOrd="0" destOrd="0" presId="urn:microsoft.com/office/officeart/2005/8/layout/vList4"/>
@@ -1343,8 +1355,8 @@
     <dgm:cxn modelId="{7E8FC05E-FE02-4336-B1F8-3EAA05519A49}" type="presOf" srcId="{D868444B-AE34-4422-A6A5-1F7D392D0C20}" destId="{54FC4CB6-0791-48D3-B2C5-2E99B8AFCFF7}" srcOrd="0" destOrd="1" presId="urn:microsoft.com/office/officeart/2005/8/layout/vList4"/>
     <dgm:cxn modelId="{4FE7AF63-70AC-4ED4-8BFB-DCB2408F3318}" srcId="{BE45140C-C326-4DAA-A267-498AD5117D68}" destId="{99FF0D0F-282A-4030-9AF5-3B7621881539}" srcOrd="2" destOrd="0" parTransId="{A86F315C-C500-49D7-B443-1D58BD48589A}" sibTransId="{1CCC8D2D-CD28-4814-B055-28ABD65CA276}"/>
     <dgm:cxn modelId="{F507E750-1488-4457-AE57-51F88C87BD16}" type="presOf" srcId="{042CE47C-DE4F-4534-9D6F-3A0CF95D58A5}" destId="{CFFDF23F-D296-4CDF-8EE4-8A672559E207}" srcOrd="1" destOrd="2" presId="urn:microsoft.com/office/officeart/2005/8/layout/vList4"/>
-    <dgm:cxn modelId="{3F2A6752-A5BB-4F63-B720-93C45E0B4F56}" type="presOf" srcId="{D546635F-000B-49DF-BB26-293CCA777400}" destId="{F36F4ED1-B414-46B8-A8C5-C0FB11F5CFBC}" srcOrd="0" destOrd="2" presId="urn:microsoft.com/office/officeart/2005/8/layout/vList4"/>
     <dgm:cxn modelId="{0E2AE979-A66C-4CEC-BFF4-5B28BB7CD9EA}" srcId="{BE45140C-C326-4DAA-A267-498AD5117D68}" destId="{02A34BC0-F8BA-4A89-87A4-4F20079DFD06}" srcOrd="1" destOrd="0" parTransId="{9ADB496F-2DB6-4F16-8C91-2EB9CDF5F2F2}" sibTransId="{44AB630E-CD8B-4223-9F51-5EEE4E054B0A}"/>
+    <dgm:cxn modelId="{FA4C0894-1234-450D-80E0-86CBEABEDE7C}" srcId="{99FF0D0F-282A-4030-9AF5-3B7621881539}" destId="{615966B1-AC44-4287-8129-C435CDE001AB}" srcOrd="1" destOrd="0" parTransId="{27B11DD4-0DCC-490B-8EB5-CC85CC7B8231}" sibTransId="{8C9BE87E-B214-4FF3-8713-4C7FFD90044C}"/>
     <dgm:cxn modelId="{2AD07198-D472-4B98-B6D5-5A730374E9A2}" srcId="{BE45140C-C326-4DAA-A267-498AD5117D68}" destId="{78BFB295-8F5D-4286-B72B-79142F8F0E13}" srcOrd="0" destOrd="0" parTransId="{F1885FAB-61EC-4F80-98D0-72360031AF9F}" sibTransId="{E88D0928-51D4-4670-8963-60ABBB193E13}"/>
     <dgm:cxn modelId="{FBEF4C9A-E5D4-462C-B35F-96C87426BEAB}" type="presOf" srcId="{A2BD12B5-7AB5-4859-B57E-1E77C0ED35DF}" destId="{F36F4ED1-B414-46B8-A8C5-C0FB11F5CFBC}" srcOrd="0" destOrd="1" presId="urn:microsoft.com/office/officeart/2005/8/layout/vList4"/>
     <dgm:cxn modelId="{690A389C-25C1-485B-88F9-437236A47744}" type="presOf" srcId="{BE45140C-C326-4DAA-A267-498AD5117D68}" destId="{6E1E561E-88C1-49C6-A3F7-DE4B9AD43273}" srcOrd="0" destOrd="0" presId="urn:microsoft.com/office/officeart/2005/8/layout/vList4"/>
@@ -1353,14 +1365,13 @@
     <dgm:cxn modelId="{9F2D15B1-6569-45E4-BB52-DA1C914D9BEB}" type="presOf" srcId="{042CE47C-DE4F-4534-9D6F-3A0CF95D58A5}" destId="{39AFE128-ACF6-44CA-B18B-64F5782CF210}" srcOrd="0" destOrd="2" presId="urn:microsoft.com/office/officeart/2005/8/layout/vList4"/>
     <dgm:cxn modelId="{67DE09B5-392E-4661-A7AE-A0572D63DA68}" type="presOf" srcId="{99FF0D0F-282A-4030-9AF5-3B7621881539}" destId="{0E12AD21-08CC-4736-A269-DD5234F9D874}" srcOrd="1" destOrd="0" presId="urn:microsoft.com/office/officeart/2005/8/layout/vList4"/>
     <dgm:cxn modelId="{778F2DBC-81F3-476D-BD99-784E4F7153C8}" srcId="{02A34BC0-F8BA-4A89-87A4-4F20079DFD06}" destId="{EA3B2395-55AF-495E-9D6B-329D2886612F}" srcOrd="0" destOrd="0" parTransId="{01DA10B6-3F7A-4C8A-AACD-F605EE6CCF20}" sibTransId="{11A4E056-7834-4F82-8A9C-B8EA31F159E3}"/>
+    <dgm:cxn modelId="{760AB7C2-4EAE-472E-8615-5A36DA05FB14}" type="presOf" srcId="{615966B1-AC44-4287-8129-C435CDE001AB}" destId="{F36F4ED1-B414-46B8-A8C5-C0FB11F5CFBC}" srcOrd="0" destOrd="2" presId="urn:microsoft.com/office/officeart/2005/8/layout/vList4"/>
     <dgm:cxn modelId="{771AC4C3-43B6-4708-AF74-1C09D131840F}" type="presOf" srcId="{62F1AA66-C25A-4E90-9F94-A2481F187857}" destId="{52D125D2-FCA7-4A2D-AB39-B6BD54F251F2}" srcOrd="1" destOrd="2" presId="urn:microsoft.com/office/officeart/2005/8/layout/vList4"/>
     <dgm:cxn modelId="{24A7E5C3-B54B-4DF2-8B73-0A88F3EB4070}" srcId="{78BFB295-8F5D-4286-B72B-79142F8F0E13}" destId="{62F1AA66-C25A-4E90-9F94-A2481F187857}" srcOrd="1" destOrd="0" parTransId="{7F4727AC-1BDA-4A7C-9217-23F0312BC14B}" sibTransId="{C526E7B5-A8A2-4E42-843E-203585FE8244}"/>
     <dgm:cxn modelId="{FE5360C5-555C-42B2-9E63-16D2D46F21B1}" type="presOf" srcId="{D868444B-AE34-4422-A6A5-1F7D392D0C20}" destId="{52D125D2-FCA7-4A2D-AB39-B6BD54F251F2}" srcOrd="1" destOrd="1" presId="urn:microsoft.com/office/officeart/2005/8/layout/vList4"/>
     <dgm:cxn modelId="{B0C181C9-77EB-4775-B9E6-C6CBDA60E6EB}" type="presOf" srcId="{EA3B2395-55AF-495E-9D6B-329D2886612F}" destId="{CFFDF23F-D296-4CDF-8EE4-8A672559E207}" srcOrd="1" destOrd="1" presId="urn:microsoft.com/office/officeart/2005/8/layout/vList4"/>
-    <dgm:cxn modelId="{D1C04ECF-982A-425F-B2B1-9CF15BCEB83B}" type="presOf" srcId="{D546635F-000B-49DF-BB26-293CCA777400}" destId="{0E12AD21-08CC-4736-A269-DD5234F9D874}" srcOrd="1" destOrd="2" presId="urn:microsoft.com/office/officeart/2005/8/layout/vList4"/>
     <dgm:cxn modelId="{22A4C7D2-C14A-4622-8C4E-3FE51F50DCC3}" type="presOf" srcId="{02A34BC0-F8BA-4A89-87A4-4F20079DFD06}" destId="{CFFDF23F-D296-4CDF-8EE4-8A672559E207}" srcOrd="1" destOrd="0" presId="urn:microsoft.com/office/officeart/2005/8/layout/vList4"/>
     <dgm:cxn modelId="{F18066D4-6A13-46C2-B18C-B61313F1AD31}" srcId="{02A34BC0-F8BA-4A89-87A4-4F20079DFD06}" destId="{042CE47C-DE4F-4534-9D6F-3A0CF95D58A5}" srcOrd="1" destOrd="0" parTransId="{F2A7D6BC-F441-4EC5-A51F-57C79CEBBCA8}" sibTransId="{04C1857B-A0FD-4099-A17B-3FDE6F932D4F}"/>
-    <dgm:cxn modelId="{AC0A7FF3-EEC4-470A-823E-BF7AF1556A99}" srcId="{99FF0D0F-282A-4030-9AF5-3B7621881539}" destId="{D546635F-000B-49DF-BB26-293CCA777400}" srcOrd="1" destOrd="0" parTransId="{5437D343-BECF-4620-B6C7-7088D8BBD91B}" sibTransId="{B01A0825-9EDF-4B9A-B345-1B486D914AD4}"/>
     <dgm:cxn modelId="{7ABE08FD-4ED4-44FB-BFBA-794B6C5FA813}" type="presOf" srcId="{EA3B2395-55AF-495E-9D6B-329D2886612F}" destId="{39AFE128-ACF6-44CA-B18B-64F5782CF210}" srcOrd="0" destOrd="1" presId="urn:microsoft.com/office/officeart/2005/8/layout/vList4"/>
     <dgm:cxn modelId="{DA463EE6-78DB-4E59-8099-EBA029F401B0}" type="presParOf" srcId="{6E1E561E-88C1-49C6-A3F7-DE4B9AD43273}" destId="{F70979D0-5925-4EC3-AD84-986E0EC7B0D8}" srcOrd="0" destOrd="0" presId="urn:microsoft.com/office/officeart/2005/8/layout/vList4"/>
     <dgm:cxn modelId="{2FE346D7-6685-4BD0-9465-988681234E35}" type="presParOf" srcId="{F70979D0-5925-4EC3-AD84-986E0EC7B0D8}" destId="{54FC4CB6-0791-48D3-B2C5-2E99B8AFCFF7}" srcOrd="0" destOrd="0" presId="urn:microsoft.com/office/officeart/2005/8/layout/vList4"/>
@@ -1474,12 +1485,12 @@
         </a:fontRef>
       </dsp:style>
       <dsp:txBody>
-        <a:bodyPr spcFirstLastPara="0" vert="horz" wrap="square" lIns="91440" tIns="91440" rIns="91440" bIns="91440" numCol="1" spcCol="1270" anchor="t" anchorCtr="0">
+        <a:bodyPr spcFirstLastPara="0" vert="horz" wrap="square" lIns="83820" tIns="83820" rIns="83820" bIns="83820" numCol="1" spcCol="1270" anchor="t" anchorCtr="0">
           <a:noAutofit/>
         </a:bodyPr>
         <a:lstStyle/>
         <a:p>
-          <a:pPr marL="0" lvl="0" indent="0" algn="l" defTabSz="1066800">
+          <a:pPr marL="0" lvl="0" indent="0" algn="l" defTabSz="977900">
             <a:lnSpc>
               <a:spcPct val="90000"/>
             </a:lnSpc>
@@ -1492,13 +1503,13 @@
             <a:buNone/>
           </a:pPr>
           <a:r>
-            <a:rPr lang="es-MX" sz="2400" kern="1200" dirty="0"/>
+            <a:rPr lang="es-MX" sz="2200" kern="1200" dirty="0"/>
             <a:t>Benjamín Alejandro Bravo Rivadeneira</a:t>
           </a:r>
-          <a:endParaRPr lang="es-CL" sz="2400" kern="1200" dirty="0"/>
+          <a:endParaRPr lang="es-CL" sz="2200" kern="1200" dirty="0"/>
         </a:p>
         <a:p>
-          <a:pPr marL="171450" lvl="1" indent="-171450" algn="l" defTabSz="844550">
+          <a:pPr marL="171450" lvl="1" indent="-171450" algn="l" defTabSz="755650">
             <a:lnSpc>
               <a:spcPct val="90000"/>
             </a:lnSpc>
@@ -1511,17 +1522,17 @@
             <a:buChar char="•"/>
           </a:pPr>
           <a:r>
-            <a:rPr lang="es-MX" sz="1900" kern="1200" dirty="0"/>
+            <a:rPr lang="es-MX" sz="1700" kern="1200" dirty="0"/>
             <a:t>Líder del proyecto y programado .</a:t>
           </a:r>
           <a:r>
-            <a:rPr lang="es-MX" sz="1900" kern="1200" dirty="0" err="1"/>
+            <a:rPr lang="es-MX" sz="1700" kern="1200" dirty="0" err="1"/>
             <a:t>js</a:t>
           </a:r>
-          <a:endParaRPr lang="es-CL" sz="1900" kern="1200" dirty="0"/>
+          <a:endParaRPr lang="es-CL" sz="1700" kern="1200" dirty="0"/>
         </a:p>
         <a:p>
-          <a:pPr marL="171450" lvl="1" indent="-171450" algn="l" defTabSz="844550">
+          <a:pPr marL="171450" lvl="1" indent="-171450" algn="l" defTabSz="755650">
             <a:lnSpc>
               <a:spcPct val="90000"/>
             </a:lnSpc>
@@ -1534,14 +1545,14 @@
             <a:buChar char="•"/>
           </a:pPr>
           <a:r>
-            <a:rPr lang="es-MX" sz="1900" kern="1200" dirty="0"/>
+            <a:rPr lang="es-MX" sz="1700" kern="1200" dirty="0"/>
             <a:t>Tener los documentos y programar validaciones en .</a:t>
           </a:r>
           <a:r>
-            <a:rPr lang="es-MX" sz="1900" kern="1200" dirty="0" err="1"/>
+            <a:rPr lang="es-MX" sz="1700" kern="1200" dirty="0" err="1"/>
             <a:t>js</a:t>
           </a:r>
-          <a:endParaRPr lang="es-CL" sz="1900" kern="1200" dirty="0"/>
+          <a:endParaRPr lang="es-CL" sz="1700" kern="1200" dirty="0"/>
         </a:p>
       </dsp:txBody>
       <dsp:txXfrm>
@@ -1680,12 +1691,12 @@
         </a:fontRef>
       </dsp:style>
       <dsp:txBody>
-        <a:bodyPr spcFirstLastPara="0" vert="horz" wrap="square" lIns="91440" tIns="91440" rIns="91440" bIns="91440" numCol="1" spcCol="1270" anchor="t" anchorCtr="0">
+        <a:bodyPr spcFirstLastPara="0" vert="horz" wrap="square" lIns="83820" tIns="83820" rIns="83820" bIns="83820" numCol="1" spcCol="1270" anchor="t" anchorCtr="0">
           <a:noAutofit/>
         </a:bodyPr>
         <a:lstStyle/>
         <a:p>
-          <a:pPr marL="0" lvl="0" indent="0" algn="l" defTabSz="1066800">
+          <a:pPr marL="0" lvl="0" indent="0" algn="l" defTabSz="977900">
             <a:lnSpc>
               <a:spcPct val="90000"/>
             </a:lnSpc>
@@ -1698,13 +1709,13 @@
             <a:buNone/>
           </a:pPr>
           <a:r>
-            <a:rPr lang="es-MX" sz="2400" kern="1200" dirty="0"/>
+            <a:rPr lang="es-MX" sz="2200" kern="1200" dirty="0"/>
             <a:t>Benjamín Ignacio Vargas Díaz</a:t>
           </a:r>
-          <a:endParaRPr lang="es-CL" sz="2400" kern="1200" dirty="0"/>
+          <a:endParaRPr lang="es-CL" sz="2200" kern="1200" dirty="0"/>
         </a:p>
         <a:p>
-          <a:pPr marL="171450" lvl="1" indent="-171450" algn="l" defTabSz="844550">
+          <a:pPr marL="171450" lvl="1" indent="-171450" algn="l" defTabSz="755650">
             <a:lnSpc>
               <a:spcPct val="90000"/>
             </a:lnSpc>
@@ -1717,13 +1728,13 @@
             <a:buChar char="•"/>
           </a:pPr>
           <a:r>
-            <a:rPr lang="es-MX" sz="1900" kern="1200" dirty="0"/>
+            <a:rPr lang="es-MX" sz="1700" kern="1200" dirty="0"/>
             <a:t>Gestor de base de datos y desarrollador</a:t>
           </a:r>
-          <a:endParaRPr lang="es-CL" sz="1900" kern="1200" dirty="0"/>
+          <a:endParaRPr lang="es-CL" sz="1700" kern="1200" dirty="0"/>
         </a:p>
         <a:p>
-          <a:pPr marL="171450" lvl="1" indent="-171450" algn="l" defTabSz="844550">
+          <a:pPr marL="171450" lvl="1" indent="-171450" algn="l" defTabSz="755650">
             <a:lnSpc>
               <a:spcPct val="90000"/>
             </a:lnSpc>
@@ -1736,10 +1747,10 @@
             <a:buChar char="•"/>
           </a:pPr>
           <a:r>
-            <a:rPr lang="es-MX" sz="1900" kern="1200" dirty="0"/>
+            <a:rPr lang="es-MX" sz="1700" kern="1200" dirty="0"/>
             <a:t>Desarrollador y levantamiento del proyecto en la nube</a:t>
           </a:r>
-          <a:endParaRPr lang="es-CL" sz="1900" kern="1200" dirty="0"/>
+          <a:endParaRPr lang="es-CL" sz="1700" kern="1200" dirty="0"/>
         </a:p>
       </dsp:txBody>
       <dsp:txXfrm>
@@ -1878,12 +1889,12 @@
         </a:fontRef>
       </dsp:style>
       <dsp:txBody>
-        <a:bodyPr spcFirstLastPara="0" vert="horz" wrap="square" lIns="91440" tIns="91440" rIns="91440" bIns="91440" numCol="1" spcCol="1270" anchor="t" anchorCtr="0">
+        <a:bodyPr spcFirstLastPara="0" vert="horz" wrap="square" lIns="83820" tIns="83820" rIns="83820" bIns="83820" numCol="1" spcCol="1270" anchor="t" anchorCtr="0">
           <a:noAutofit/>
         </a:bodyPr>
         <a:lstStyle/>
         <a:p>
-          <a:pPr marL="0" lvl="0" indent="0" algn="l" defTabSz="1066800">
+          <a:pPr marL="0" lvl="0" indent="0" algn="l" defTabSz="977900">
             <a:lnSpc>
               <a:spcPct val="90000"/>
             </a:lnSpc>
@@ -1896,13 +1907,13 @@
             <a:buNone/>
           </a:pPr>
           <a:r>
-            <a:rPr lang="es-MX" sz="2400" kern="1200" dirty="0"/>
-            <a:t>Nombre de estudiante</a:t>
+            <a:rPr lang="es-MX" sz="2200" kern="1200" dirty="0"/>
+            <a:t>Felipe Teodoro Muñoz González </a:t>
           </a:r>
-          <a:endParaRPr lang="es-CL" sz="2400" kern="1200" dirty="0"/>
+          <a:endParaRPr lang="es-CL" sz="2200" kern="1200" dirty="0"/>
         </a:p>
         <a:p>
-          <a:pPr marL="171450" lvl="1" indent="-171450" algn="l" defTabSz="844550">
+          <a:pPr marL="171450" lvl="1" indent="-171450" algn="l" defTabSz="755650">
             <a:lnSpc>
               <a:spcPct val="90000"/>
             </a:lnSpc>
@@ -1915,13 +1926,25 @@
             <a:buChar char="•"/>
           </a:pPr>
           <a:r>
-            <a:rPr lang="es-MX" sz="1900" kern="1200" dirty="0"/>
-            <a:t>Cargo</a:t>
+            <a:rPr lang="es-MX" sz="1700" kern="1200" dirty="0" err="1"/>
+            <a:t>Product</a:t>
           </a:r>
-          <a:endParaRPr lang="es-CL" sz="1900" kern="1200" dirty="0"/>
+          <a:r>
+            <a:rPr lang="es-MX" sz="1700" kern="1200" dirty="0"/>
+            <a:t> </a:t>
+          </a:r>
+          <a:r>
+            <a:rPr lang="es-MX" sz="1700" kern="1200" dirty="0" err="1"/>
+            <a:t>Owner</a:t>
+          </a:r>
+          <a:r>
+            <a:rPr lang="es-MX" sz="1700" kern="1200" dirty="0"/>
+            <a:t> e Ingeniero de Interacción por Voz.}</a:t>
+          </a:r>
+          <a:endParaRPr lang="es-CL" sz="1700" kern="1200" dirty="0"/>
         </a:p>
         <a:p>
-          <a:pPr marL="171450" lvl="1" indent="-171450" algn="l" defTabSz="844550">
+          <a:pPr marL="171450" lvl="1" indent="-171450" algn="l" defTabSz="755650">
             <a:lnSpc>
               <a:spcPct val="90000"/>
             </a:lnSpc>
@@ -1934,10 +1957,9 @@
             <a:buChar char="•"/>
           </a:pPr>
           <a:r>
-            <a:rPr lang="es-MX" sz="1900" kern="1200" dirty="0"/>
-            <a:t>Funciones desempeñadas</a:t>
+            <a:rPr lang="es-CL" sz="1700" kern="1200" dirty="0"/>
+            <a:t>Coordinar e implementar nuevas funcionalidades, Implementar sistemas de navegación inclusivos.</a:t>
           </a:r>
-          <a:endParaRPr lang="es-CL" sz="1900" kern="1200" dirty="0"/>
         </a:p>
       </dsp:txBody>
       <dsp:txXfrm>
@@ -1960,15 +1982,19 @@
             <a:gd name="adj" fmla="val 10000"/>
           </a:avLst>
         </a:prstGeom>
-        <a:solidFill>
-          <a:schemeClr val="accent5">
-            <a:tint val="50000"/>
-            <a:hueOff val="0"/>
-            <a:satOff val="0"/>
-            <a:lumOff val="0"/>
-            <a:alphaOff val="0"/>
-          </a:schemeClr>
-        </a:solidFill>
+        <a:blipFill>
+          <a:blip xmlns:r="http://schemas.openxmlformats.org/officeDocument/2006/relationships" r:embed="rId3">
+            <a:extLst>
+              <a:ext uri="{28A0092B-C50C-407E-A947-70E740481C1C}">
+                <a14:useLocalDpi xmlns:a14="http://schemas.microsoft.com/office/drawing/2010/main" val="0"/>
+              </a:ext>
+            </a:extLst>
+          </a:blip>
+          <a:srcRect/>
+          <a:stretch>
+            <a:fillRect t="-55000" b="-55000"/>
+          </a:stretch>
+        </a:blipFill>
         <a:ln>
           <a:noFill/>
         </a:ln>
@@ -6998,6 +7024,36 @@
           </a:p>
         </p:txBody>
       </p:sp>
+      <p:pic>
+        <p:nvPicPr>
+          <p:cNvPr id="2" name="Imagen 1">
+            <a:extLst>
+              <a:ext uri="{FF2B5EF4-FFF2-40B4-BE49-F238E27FC236}">
+                <a16:creationId xmlns:a16="http://schemas.microsoft.com/office/drawing/2014/main" id="{CBEA72EA-4471-4941-A477-DB5D80ACA950}"/>
+              </a:ext>
+            </a:extLst>
+          </p:cNvPr>
+          <p:cNvPicPr>
+            <a:picLocks noChangeAspect="1"/>
+          </p:cNvPicPr>
+          <p:nvPr/>
+        </p:nvPicPr>
+        <p:blipFill>
+          <a:blip r:embed="rId3"/>
+          <a:stretch>
+            <a:fillRect/>
+          </a:stretch>
+        </p:blipFill>
+        <p:spPr>
+          <a:xfrm>
+            <a:off x="4876800" y="3883130"/>
+            <a:ext cx="2438400" cy="2438400"/>
+          </a:xfrm>
+          <a:prstGeom prst="rect">
+            <a:avLst/>
+          </a:prstGeom>
+        </p:spPr>
+      </p:pic>
     </p:spTree>
     <p:extLst>
       <p:ext uri="{BB962C8B-B14F-4D97-AF65-F5344CB8AC3E}">
@@ -7439,7 +7495,7 @@
           <p:nvPr>
             <p:extLst>
               <p:ext uri="{D42A27DB-BD31-4B8C-83A1-F6EECF244321}">
-                <p14:modId xmlns:p14="http://schemas.microsoft.com/office/powerpoint/2010/main" val="1453126575"/>
+                <p14:modId xmlns:p14="http://schemas.microsoft.com/office/powerpoint/2010/main" val="398468133"/>
               </p:ext>
             </p:extLst>
           </p:nvPr>
@@ -9439,7 +9495,15 @@
             </a:r>
             <a:r>
               <a:rPr lang="es-MX" dirty="0"/>
-              <a:t>” </a:t>
+              <a:t>” cada uno se conforma internamente por de mínimo 2 y de máximo de 3 tareas cada uno de los “</a:t>
+            </a:r>
+            <a:r>
+              <a:rPr lang="es-MX" dirty="0" err="1"/>
+              <a:t>Sprints</a:t>
+            </a:r>
+            <a:r>
+              <a:rPr lang="es-MX" dirty="0"/>
+              <a:t>”</a:t>
             </a:r>
             <a:endParaRPr lang="es-MX" sz="1800" dirty="0"/>
           </a:p>
@@ -16556,4 +16620,24 @@
     </a:ext>
   </a:extLst>
 </a:theme>
+</file>
+
+<file path=ppt/webextensions/taskpanes.xml><?xml version="1.0" encoding="utf-8"?>
+<wetp:taskpanes xmlns:wetp="http://schemas.microsoft.com/office/webextensions/taskpanes/2010/11">
+  <wetp:taskpane dockstate="right" visibility="0" width="438" row="0">
+    <wetp:webextensionref xmlns:r="http://schemas.openxmlformats.org/officeDocument/2006/relationships" r:id="rId1"/>
+  </wetp:taskpane>
+</wetp:taskpanes>
+</file>
+
+<file path=ppt/webextensions/webextension1.xml><?xml version="1.0" encoding="utf-8"?>
+<we:webextension xmlns:we="http://schemas.microsoft.com/office/webextensions/webextension/2010/11" id="{7DD23ADF-39CE-4016-A2E2-A7AF629A9892}">
+  <we:reference id="wa200002492" version="1.0.0.3" store="es-ES" storeType="OMEX"/>
+  <we:alternateReferences>
+    <we:reference id="wa200002492" version="1.0.0.3" store="WA200002492" storeType="OMEX"/>
+  </we:alternateReferences>
+  <we:properties/>
+  <we:bindings/>
+  <we:snapshot xmlns:r="http://schemas.openxmlformats.org/officeDocument/2006/relationships"/>
+</we:webextension>
 </file>
--- a/Fase 3/Evidencias Grupales/Formato Presentación final.pptx
+++ b/Fase 3/Evidencias Grupales/Formato Presentación final.pptx
@@ -1219,10 +1219,24 @@
     <dgm:pt modelId="{27B11DD4-0DCC-490B-8EB5-CC85CC7B8231}" type="parTrans" cxnId="{FA4C0894-1234-450D-80E0-86CBEABEDE7C}">
       <dgm:prSet/>
       <dgm:spPr/>
+      <dgm:t>
+        <a:bodyPr/>
+        <a:lstStyle/>
+        <a:p>
+          <a:endParaRPr lang="es-CL"/>
+        </a:p>
+      </dgm:t>
     </dgm:pt>
     <dgm:pt modelId="{8C9BE87E-B214-4FF3-8713-4C7FFD90044C}" type="sibTrans" cxnId="{FA4C0894-1234-450D-80E0-86CBEABEDE7C}">
       <dgm:prSet/>
       <dgm:spPr/>
+      <dgm:t>
+        <a:bodyPr/>
+        <a:lstStyle/>
+        <a:p>
+          <a:endParaRPr lang="es-CL"/>
+        </a:p>
+      </dgm:t>
     </dgm:pt>
     <dgm:pt modelId="{6E1E561E-88C1-49C6-A3F7-DE4B9AD43273}" type="pres">
       <dgm:prSet presAssocID="{BE45140C-C326-4DAA-A267-498AD5117D68}" presName="linear" presStyleCnt="0">
@@ -1281,21 +1295,7 @@
     </dgm:pt>
     <dgm:pt modelId="{3F97C059-D720-4D48-953F-B84D04D0BF79}" type="pres">
       <dgm:prSet presAssocID="{02A34BC0-F8BA-4A89-87A4-4F20079DFD06}" presName="img" presStyleLbl="fgImgPlace1" presStyleIdx="1" presStyleCnt="3"/>
-      <dgm:spPr>
-        <a:blipFill>
-          <a:blip xmlns:r="http://schemas.openxmlformats.org/officeDocument/2006/relationships" r:embed="rId2">
-            <a:extLst>
-              <a:ext uri="{28A0092B-C50C-407E-A947-70E740481C1C}">
-                <a14:useLocalDpi xmlns:a14="http://schemas.microsoft.com/office/drawing/2010/main" val="0"/>
-              </a:ext>
-            </a:extLst>
-          </a:blip>
-          <a:srcRect/>
-          <a:stretch>
-            <a:fillRect t="-75000" b="-75000"/>
-          </a:stretch>
-        </a:blipFill>
-      </dgm:spPr>
+      <dgm:spPr/>
     </dgm:pt>
     <dgm:pt modelId="{CFFDF23F-D296-4CDF-8EE4-8A672559E207}" type="pres">
       <dgm:prSet presAssocID="{02A34BC0-F8BA-4A89-87A4-4F20079DFD06}" presName="text" presStyleLbl="node1" presStyleIdx="1" presStyleCnt="3">
@@ -1319,21 +1319,7 @@
     </dgm:pt>
     <dgm:pt modelId="{7C6A764B-C67C-494C-B90E-7B3C3DDE54A4}" type="pres">
       <dgm:prSet presAssocID="{99FF0D0F-282A-4030-9AF5-3B7621881539}" presName="img" presStyleLbl="fgImgPlace1" presStyleIdx="2" presStyleCnt="3"/>
-      <dgm:spPr>
-        <a:blipFill>
-          <a:blip xmlns:r="http://schemas.openxmlformats.org/officeDocument/2006/relationships" r:embed="rId3">
-            <a:extLst>
-              <a:ext uri="{28A0092B-C50C-407E-A947-70E740481C1C}">
-                <a14:useLocalDpi xmlns:a14="http://schemas.microsoft.com/office/drawing/2010/main" val="0"/>
-              </a:ext>
-            </a:extLst>
-          </a:blip>
-          <a:srcRect/>
-          <a:stretch>
-            <a:fillRect t="-55000" b="-55000"/>
-          </a:stretch>
-        </a:blipFill>
-      </dgm:spPr>
+      <dgm:spPr/>
     </dgm:pt>
     <dgm:pt modelId="{0E12AD21-08CC-4736-A269-DD5234F9D874}" type="pres">
       <dgm:prSet presAssocID="{99FF0D0F-282A-4030-9AF5-3B7621881539}" presName="text" presStyleLbl="node1" presStyleIdx="2" presStyleCnt="3">
@@ -1414,7 +1400,7 @@
       <dsp:spPr>
         <a:xfrm>
           <a:off x="0" y="0"/>
-          <a:ext cx="7633494" cy="1359548"/>
+          <a:ext cx="7738332" cy="1420729"/>
         </a:xfrm>
         <a:prstGeom prst="roundRect">
           <a:avLst>
@@ -1485,12 +1471,12 @@
         </a:fontRef>
       </dsp:style>
       <dsp:txBody>
-        <a:bodyPr spcFirstLastPara="0" vert="horz" wrap="square" lIns="83820" tIns="83820" rIns="83820" bIns="83820" numCol="1" spcCol="1270" anchor="t" anchorCtr="0">
+        <a:bodyPr spcFirstLastPara="0" vert="horz" wrap="square" lIns="87630" tIns="87630" rIns="87630" bIns="87630" numCol="1" spcCol="1270" anchor="t" anchorCtr="0">
           <a:noAutofit/>
         </a:bodyPr>
         <a:lstStyle/>
         <a:p>
-          <a:pPr marL="0" lvl="0" indent="0" algn="l" defTabSz="977900">
+          <a:pPr marL="0" lvl="0" indent="0" algn="l" defTabSz="1022350">
             <a:lnSpc>
               <a:spcPct val="90000"/>
             </a:lnSpc>
@@ -1503,13 +1489,13 @@
             <a:buNone/>
           </a:pPr>
           <a:r>
-            <a:rPr lang="es-MX" sz="2200" kern="1200" dirty="0"/>
+            <a:rPr lang="es-MX" sz="2300" kern="1200" dirty="0"/>
             <a:t>Benjamín Alejandro Bravo Rivadeneira</a:t>
           </a:r>
-          <a:endParaRPr lang="es-CL" sz="2200" kern="1200" dirty="0"/>
+          <a:endParaRPr lang="es-CL" sz="2300" kern="1200" dirty="0"/>
         </a:p>
         <a:p>
-          <a:pPr marL="171450" lvl="1" indent="-171450" algn="l" defTabSz="755650">
+          <a:pPr marL="171450" lvl="1" indent="-171450" algn="l" defTabSz="800100">
             <a:lnSpc>
               <a:spcPct val="90000"/>
             </a:lnSpc>
@@ -1522,17 +1508,17 @@
             <a:buChar char="•"/>
           </a:pPr>
           <a:r>
-            <a:rPr lang="es-MX" sz="1700" kern="1200" dirty="0"/>
+            <a:rPr lang="es-MX" sz="1800" kern="1200" dirty="0"/>
             <a:t>Líder del proyecto y programado .</a:t>
           </a:r>
           <a:r>
-            <a:rPr lang="es-MX" sz="1700" kern="1200" dirty="0" err="1"/>
+            <a:rPr lang="es-MX" sz="1800" kern="1200" dirty="0" err="1"/>
             <a:t>js</a:t>
           </a:r>
-          <a:endParaRPr lang="es-CL" sz="1700" kern="1200" dirty="0"/>
+          <a:endParaRPr lang="es-CL" sz="1800" kern="1200" dirty="0"/>
         </a:p>
         <a:p>
-          <a:pPr marL="171450" lvl="1" indent="-171450" algn="l" defTabSz="755650">
+          <a:pPr marL="171450" lvl="1" indent="-171450" algn="l" defTabSz="800100">
             <a:lnSpc>
               <a:spcPct val="90000"/>
             </a:lnSpc>
@@ -1545,19 +1531,19 @@
             <a:buChar char="•"/>
           </a:pPr>
           <a:r>
-            <a:rPr lang="es-MX" sz="1700" kern="1200" dirty="0"/>
+            <a:rPr lang="es-MX" sz="1800" kern="1200" dirty="0"/>
             <a:t>Tener los documentos y programar validaciones en .</a:t>
           </a:r>
           <a:r>
-            <a:rPr lang="es-MX" sz="1700" kern="1200" dirty="0" err="1"/>
+            <a:rPr lang="es-MX" sz="1800" kern="1200" dirty="0" err="1"/>
             <a:t>js</a:t>
           </a:r>
-          <a:endParaRPr lang="es-CL" sz="1700" kern="1200" dirty="0"/>
+          <a:endParaRPr lang="es-CL" sz="1800" kern="1200" dirty="0"/>
         </a:p>
       </dsp:txBody>
       <dsp:txXfrm>
-        <a:off x="1662653" y="0"/>
-        <a:ext cx="5970840" cy="1359548"/>
+        <a:off x="1689739" y="0"/>
+        <a:ext cx="6048592" cy="1420729"/>
       </dsp:txXfrm>
     </dsp:sp>
     <dsp:sp modelId="{9A7E2690-DE9C-4572-9BE5-B8C9A3B8BBB3}">
@@ -1567,8 +1553,8 @@
       </dsp:nvSpPr>
       <dsp:spPr>
         <a:xfrm>
-          <a:off x="135954" y="135954"/>
-          <a:ext cx="1526698" cy="1087638"/>
+          <a:off x="142072" y="142072"/>
+          <a:ext cx="1547666" cy="1136583"/>
         </a:xfrm>
         <a:prstGeom prst="roundRect">
           <a:avLst>
@@ -1619,8 +1605,8 @@
       </dsp:nvSpPr>
       <dsp:spPr>
         <a:xfrm>
-          <a:off x="0" y="1495502"/>
-          <a:ext cx="7633494" cy="1359548"/>
+          <a:off x="0" y="1562802"/>
+          <a:ext cx="7738332" cy="1420729"/>
         </a:xfrm>
         <a:prstGeom prst="roundRect">
           <a:avLst>
@@ -1691,12 +1677,12 @@
         </a:fontRef>
       </dsp:style>
       <dsp:txBody>
-        <a:bodyPr spcFirstLastPara="0" vert="horz" wrap="square" lIns="83820" tIns="83820" rIns="83820" bIns="83820" numCol="1" spcCol="1270" anchor="t" anchorCtr="0">
+        <a:bodyPr spcFirstLastPara="0" vert="horz" wrap="square" lIns="87630" tIns="87630" rIns="87630" bIns="87630" numCol="1" spcCol="1270" anchor="t" anchorCtr="0">
           <a:noAutofit/>
         </a:bodyPr>
         <a:lstStyle/>
         <a:p>
-          <a:pPr marL="0" lvl="0" indent="0" algn="l" defTabSz="977900">
+          <a:pPr marL="0" lvl="0" indent="0" algn="l" defTabSz="1022350">
             <a:lnSpc>
               <a:spcPct val="90000"/>
             </a:lnSpc>
@@ -1709,13 +1695,13 @@
             <a:buNone/>
           </a:pPr>
           <a:r>
-            <a:rPr lang="es-MX" sz="2200" kern="1200" dirty="0"/>
+            <a:rPr lang="es-MX" sz="2300" kern="1200" dirty="0"/>
             <a:t>Benjamín Ignacio Vargas Díaz</a:t>
           </a:r>
-          <a:endParaRPr lang="es-CL" sz="2200" kern="1200" dirty="0"/>
+          <a:endParaRPr lang="es-CL" sz="2300" kern="1200" dirty="0"/>
         </a:p>
         <a:p>
-          <a:pPr marL="171450" lvl="1" indent="-171450" algn="l" defTabSz="755650">
+          <a:pPr marL="171450" lvl="1" indent="-171450" algn="l" defTabSz="800100">
             <a:lnSpc>
               <a:spcPct val="90000"/>
             </a:lnSpc>
@@ -1728,13 +1714,13 @@
             <a:buChar char="•"/>
           </a:pPr>
           <a:r>
-            <a:rPr lang="es-MX" sz="1700" kern="1200" dirty="0"/>
+            <a:rPr lang="es-MX" sz="1800" kern="1200" dirty="0"/>
             <a:t>Gestor de base de datos y desarrollador</a:t>
           </a:r>
-          <a:endParaRPr lang="es-CL" sz="1700" kern="1200" dirty="0"/>
+          <a:endParaRPr lang="es-CL" sz="1800" kern="1200" dirty="0"/>
         </a:p>
         <a:p>
-          <a:pPr marL="171450" lvl="1" indent="-171450" algn="l" defTabSz="755650">
+          <a:pPr marL="171450" lvl="1" indent="-171450" algn="l" defTabSz="800100">
             <a:lnSpc>
               <a:spcPct val="90000"/>
             </a:lnSpc>
@@ -1747,15 +1733,15 @@
             <a:buChar char="•"/>
           </a:pPr>
           <a:r>
-            <a:rPr lang="es-MX" sz="1700" kern="1200" dirty="0"/>
+            <a:rPr lang="es-MX" sz="1800" kern="1200" dirty="0"/>
             <a:t>Desarrollador y levantamiento del proyecto en la nube</a:t>
           </a:r>
-          <a:endParaRPr lang="es-CL" sz="1700" kern="1200" dirty="0"/>
+          <a:endParaRPr lang="es-CL" sz="1800" kern="1200" dirty="0"/>
         </a:p>
       </dsp:txBody>
       <dsp:txXfrm>
-        <a:off x="1662653" y="1495502"/>
-        <a:ext cx="5970840" cy="1359548"/>
+        <a:off x="1689739" y="1562802"/>
+        <a:ext cx="6048592" cy="1420729"/>
       </dsp:txXfrm>
     </dsp:sp>
     <dsp:sp modelId="{3F97C059-D720-4D48-953F-B84D04D0BF79}">
@@ -1765,27 +1751,23 @@
       </dsp:nvSpPr>
       <dsp:spPr>
         <a:xfrm>
-          <a:off x="135954" y="1631457"/>
-          <a:ext cx="1526698" cy="1087638"/>
+          <a:off x="142072" y="1704875"/>
+          <a:ext cx="1547666" cy="1136583"/>
         </a:xfrm>
         <a:prstGeom prst="roundRect">
           <a:avLst>
             <a:gd name="adj" fmla="val 10000"/>
           </a:avLst>
         </a:prstGeom>
-        <a:blipFill>
-          <a:blip xmlns:r="http://schemas.openxmlformats.org/officeDocument/2006/relationships" r:embed="rId2">
-            <a:extLst>
-              <a:ext uri="{28A0092B-C50C-407E-A947-70E740481C1C}">
-                <a14:useLocalDpi xmlns:a14="http://schemas.microsoft.com/office/drawing/2010/main" val="0"/>
-              </a:ext>
-            </a:extLst>
-          </a:blip>
-          <a:srcRect/>
-          <a:stretch>
-            <a:fillRect t="-75000" b="-75000"/>
-          </a:stretch>
-        </a:blipFill>
+        <a:solidFill>
+          <a:schemeClr val="accent5">
+            <a:tint val="50000"/>
+            <a:hueOff val="0"/>
+            <a:satOff val="0"/>
+            <a:lumOff val="0"/>
+            <a:alphaOff val="0"/>
+          </a:schemeClr>
+        </a:solidFill>
         <a:ln>
           <a:noFill/>
         </a:ln>
@@ -1817,8 +1799,8 @@
       </dsp:nvSpPr>
       <dsp:spPr>
         <a:xfrm>
-          <a:off x="0" y="2991005"/>
-          <a:ext cx="7633494" cy="1359548"/>
+          <a:off x="0" y="3125605"/>
+          <a:ext cx="7738332" cy="1420729"/>
         </a:xfrm>
         <a:prstGeom prst="roundRect">
           <a:avLst>
@@ -1889,12 +1871,12 @@
         </a:fontRef>
       </dsp:style>
       <dsp:txBody>
-        <a:bodyPr spcFirstLastPara="0" vert="horz" wrap="square" lIns="83820" tIns="83820" rIns="83820" bIns="83820" numCol="1" spcCol="1270" anchor="t" anchorCtr="0">
+        <a:bodyPr spcFirstLastPara="0" vert="horz" wrap="square" lIns="87630" tIns="87630" rIns="87630" bIns="87630" numCol="1" spcCol="1270" anchor="t" anchorCtr="0">
           <a:noAutofit/>
         </a:bodyPr>
         <a:lstStyle/>
         <a:p>
-          <a:pPr marL="0" lvl="0" indent="0" algn="l" defTabSz="977900">
+          <a:pPr marL="0" lvl="0" indent="0" algn="l" defTabSz="1022350">
             <a:lnSpc>
               <a:spcPct val="90000"/>
             </a:lnSpc>
@@ -1907,13 +1889,13 @@
             <a:buNone/>
           </a:pPr>
           <a:r>
-            <a:rPr lang="es-MX" sz="2200" kern="1200" dirty="0"/>
+            <a:rPr lang="es-MX" sz="2300" kern="1200" dirty="0"/>
             <a:t>Felipe Teodoro Muñoz González </a:t>
           </a:r>
-          <a:endParaRPr lang="es-CL" sz="2200" kern="1200" dirty="0"/>
+          <a:endParaRPr lang="es-CL" sz="2300" kern="1200" dirty="0"/>
         </a:p>
         <a:p>
-          <a:pPr marL="171450" lvl="1" indent="-171450" algn="l" defTabSz="755650">
+          <a:pPr marL="171450" lvl="1" indent="-171450" algn="l" defTabSz="800100">
             <a:lnSpc>
               <a:spcPct val="90000"/>
             </a:lnSpc>
@@ -1926,25 +1908,25 @@
             <a:buChar char="•"/>
           </a:pPr>
           <a:r>
-            <a:rPr lang="es-MX" sz="1700" kern="1200" dirty="0" err="1"/>
+            <a:rPr lang="es-MX" sz="1800" kern="1200" dirty="0" err="1"/>
             <a:t>Product</a:t>
           </a:r>
           <a:r>
-            <a:rPr lang="es-MX" sz="1700" kern="1200" dirty="0"/>
+            <a:rPr lang="es-MX" sz="1800" kern="1200" dirty="0"/>
             <a:t> </a:t>
           </a:r>
           <a:r>
-            <a:rPr lang="es-MX" sz="1700" kern="1200" dirty="0" err="1"/>
+            <a:rPr lang="es-MX" sz="1800" kern="1200" dirty="0" err="1"/>
             <a:t>Owner</a:t>
           </a:r>
           <a:r>
-            <a:rPr lang="es-MX" sz="1700" kern="1200" dirty="0"/>
+            <a:rPr lang="es-MX" sz="1800" kern="1200" dirty="0"/>
             <a:t> e Ingeniero de Interacción por Voz.}</a:t>
           </a:r>
-          <a:endParaRPr lang="es-CL" sz="1700" kern="1200" dirty="0"/>
+          <a:endParaRPr lang="es-CL" sz="1800" kern="1200" dirty="0"/>
         </a:p>
         <a:p>
-          <a:pPr marL="171450" lvl="1" indent="-171450" algn="l" defTabSz="755650">
+          <a:pPr marL="171450" lvl="1" indent="-171450" algn="l" defTabSz="800100">
             <a:lnSpc>
               <a:spcPct val="90000"/>
             </a:lnSpc>
@@ -1957,14 +1939,14 @@
             <a:buChar char="•"/>
           </a:pPr>
           <a:r>
-            <a:rPr lang="es-CL" sz="1700" kern="1200" dirty="0"/>
+            <a:rPr lang="es-CL" sz="1800" kern="1200" dirty="0"/>
             <a:t>Coordinar e implementar nuevas funcionalidades, Implementar sistemas de navegación inclusivos.</a:t>
           </a:r>
         </a:p>
       </dsp:txBody>
       <dsp:txXfrm>
-        <a:off x="1662653" y="2991005"/>
-        <a:ext cx="5970840" cy="1359548"/>
+        <a:off x="1689739" y="3125605"/>
+        <a:ext cx="6048592" cy="1420729"/>
       </dsp:txXfrm>
     </dsp:sp>
     <dsp:sp modelId="{7C6A764B-C67C-494C-B90E-7B3C3DDE54A4}">
@@ -1974,27 +1956,23 @@
       </dsp:nvSpPr>
       <dsp:spPr>
         <a:xfrm>
-          <a:off x="135954" y="3126960"/>
-          <a:ext cx="1526698" cy="1087638"/>
+          <a:off x="142072" y="3267678"/>
+          <a:ext cx="1547666" cy="1136583"/>
         </a:xfrm>
         <a:prstGeom prst="roundRect">
           <a:avLst>
             <a:gd name="adj" fmla="val 10000"/>
           </a:avLst>
         </a:prstGeom>
-        <a:blipFill>
-          <a:blip xmlns:r="http://schemas.openxmlformats.org/officeDocument/2006/relationships" r:embed="rId3">
-            <a:extLst>
-              <a:ext uri="{28A0092B-C50C-407E-A947-70E740481C1C}">
-                <a14:useLocalDpi xmlns:a14="http://schemas.microsoft.com/office/drawing/2010/main" val="0"/>
-              </a:ext>
-            </a:extLst>
-          </a:blip>
-          <a:srcRect/>
-          <a:stretch>
-            <a:fillRect t="-55000" b="-55000"/>
-          </a:stretch>
-        </a:blipFill>
+        <a:solidFill>
+          <a:schemeClr val="accent5">
+            <a:tint val="50000"/>
+            <a:hueOff val="0"/>
+            <a:satOff val="0"/>
+            <a:lumOff val="0"/>
+            <a:alphaOff val="0"/>
+          </a:schemeClr>
+        </a:solidFill>
         <a:ln>
           <a:noFill/>
         </a:ln>
@@ -3413,7 +3391,7 @@
           <a:p>
             <a:fld id="{6E1704C8-43E3-4F4F-BE90-356A640D5754}" type="datetimeFigureOut">
               <a:rPr lang="es-CL" smtClean="0"/>
-              <a:t>18-11-2025</a:t>
+              <a:t>19-11-2025</a:t>
             </a:fld>
             <a:endParaRPr lang="es-CL"/>
           </a:p>
@@ -3616,7 +3594,7 @@
           <a:p>
             <a:fld id="{6E1704C8-43E3-4F4F-BE90-356A640D5754}" type="datetimeFigureOut">
               <a:rPr lang="es-CL" smtClean="0"/>
-              <a:t>18-11-2025</a:t>
+              <a:t>19-11-2025</a:t>
             </a:fld>
             <a:endParaRPr lang="es-CL"/>
           </a:p>
@@ -3829,7 +3807,7 @@
           <a:p>
             <a:fld id="{6E1704C8-43E3-4F4F-BE90-356A640D5754}" type="datetimeFigureOut">
               <a:rPr lang="es-CL" smtClean="0"/>
-              <a:t>18-11-2025</a:t>
+              <a:t>19-11-2025</a:t>
             </a:fld>
             <a:endParaRPr lang="es-CL"/>
           </a:p>
@@ -4032,7 +4010,7 @@
           <a:p>
             <a:fld id="{6E1704C8-43E3-4F4F-BE90-356A640D5754}" type="datetimeFigureOut">
               <a:rPr lang="es-CL" smtClean="0"/>
-              <a:t>18-11-2025</a:t>
+              <a:t>19-11-2025</a:t>
             </a:fld>
             <a:endParaRPr lang="es-CL"/>
           </a:p>
@@ -4311,7 +4289,7 @@
           <a:p>
             <a:fld id="{6E1704C8-43E3-4F4F-BE90-356A640D5754}" type="datetimeFigureOut">
               <a:rPr lang="es-CL" smtClean="0"/>
-              <a:t>18-11-2025</a:t>
+              <a:t>19-11-2025</a:t>
             </a:fld>
             <a:endParaRPr lang="es-CL"/>
           </a:p>
@@ -4582,7 +4560,7 @@
           <a:p>
             <a:fld id="{6E1704C8-43E3-4F4F-BE90-356A640D5754}" type="datetimeFigureOut">
               <a:rPr lang="es-CL" smtClean="0"/>
-              <a:t>18-11-2025</a:t>
+              <a:t>19-11-2025</a:t>
             </a:fld>
             <a:endParaRPr lang="es-CL"/>
           </a:p>
@@ -5000,7 +4978,7 @@
           <a:p>
             <a:fld id="{6E1704C8-43E3-4F4F-BE90-356A640D5754}" type="datetimeFigureOut">
               <a:rPr lang="es-CL" smtClean="0"/>
-              <a:t>18-11-2025</a:t>
+              <a:t>19-11-2025</a:t>
             </a:fld>
             <a:endParaRPr lang="es-CL"/>
           </a:p>
@@ -5145,7 +5123,7 @@
           <a:p>
             <a:fld id="{6E1704C8-43E3-4F4F-BE90-356A640D5754}" type="datetimeFigureOut">
               <a:rPr lang="es-CL" smtClean="0"/>
-              <a:t>18-11-2025</a:t>
+              <a:t>19-11-2025</a:t>
             </a:fld>
             <a:endParaRPr lang="es-CL"/>
           </a:p>
@@ -5261,7 +5239,7 @@
           <a:p>
             <a:fld id="{6E1704C8-43E3-4F4F-BE90-356A640D5754}" type="datetimeFigureOut">
               <a:rPr lang="es-CL" smtClean="0"/>
-              <a:t>18-11-2025</a:t>
+              <a:t>19-11-2025</a:t>
             </a:fld>
             <a:endParaRPr lang="es-CL"/>
           </a:p>
@@ -5577,7 +5555,7 @@
           <a:p>
             <a:fld id="{6E1704C8-43E3-4F4F-BE90-356A640D5754}" type="datetimeFigureOut">
               <a:rPr lang="es-CL" smtClean="0"/>
-              <a:t>18-11-2025</a:t>
+              <a:t>19-11-2025</a:t>
             </a:fld>
             <a:endParaRPr lang="es-CL"/>
           </a:p>
@@ -5869,7 +5847,7 @@
           <a:p>
             <a:fld id="{6E1704C8-43E3-4F4F-BE90-356A640D5754}" type="datetimeFigureOut">
               <a:rPr lang="es-CL" smtClean="0"/>
-              <a:t>18-11-2025</a:t>
+              <a:t>19-11-2025</a:t>
             </a:fld>
             <a:endParaRPr lang="es-CL"/>
           </a:p>
@@ -6115,7 +6093,7 @@
           <a:p>
             <a:fld id="{6E1704C8-43E3-4F4F-BE90-356A640D5754}" type="datetimeFigureOut">
               <a:rPr lang="es-CL" smtClean="0"/>
-              <a:t>18-11-2025</a:t>
+              <a:t>19-11-2025</a:t>
             </a:fld>
             <a:endParaRPr lang="es-CL"/>
           </a:p>
@@ -6779,7 +6757,45 @@
                   </a:schemeClr>
                 </a:solidFill>
               </a:rPr>
-              <a:t>PROYECTO “NOMBRE DEL PROYECTO”</a:t>
+              <a:t>PROYECTO  “</a:t>
+            </a:r>
+            <a:r>
+              <a:rPr lang="es-MX" sz="1800" dirty="0"/>
+              <a:t>I</a:t>
+            </a:r>
+            <a:r>
+              <a:rPr lang="es-CL" sz="1800" i="0" dirty="0" err="1">
+                <a:effectLst/>
+              </a:rPr>
+              <a:t>nclushop</a:t>
+            </a:r>
+            <a:r>
+              <a:rPr lang="es-CL" sz="1800" i="0" dirty="0">
+                <a:effectLst/>
+              </a:rPr>
+              <a:t> : Herramientas para un E-</a:t>
+            </a:r>
+            <a:r>
+              <a:rPr lang="es-CL" sz="1800" i="0" dirty="0" err="1">
+                <a:effectLst/>
+              </a:rPr>
+              <a:t>commerce</a:t>
+            </a:r>
+            <a:r>
+              <a:rPr lang="es-CL" sz="1800" i="0" dirty="0">
+                <a:effectLst/>
+              </a:rPr>
+              <a:t> inclusivo</a:t>
+            </a:r>
+            <a:r>
+              <a:rPr lang="es-MX" dirty="0">
+                <a:solidFill>
+                  <a:schemeClr val="bg2">
+                    <a:lumMod val="50000"/>
+                  </a:schemeClr>
+                </a:solidFill>
+              </a:rPr>
+              <a:t>”</a:t>
             </a:r>
           </a:p>
         </p:txBody>
@@ -6888,6 +6904,99 @@
           </a:fontRef>
         </p:style>
       </p:cxnSp>
+      <p:sp>
+        <p:nvSpPr>
+          <p:cNvPr id="8" name="CuadroTexto 7">
+            <a:extLst>
+              <a:ext uri="{FF2B5EF4-FFF2-40B4-BE49-F238E27FC236}">
+                <a16:creationId xmlns:a16="http://schemas.microsoft.com/office/drawing/2014/main" id="{C5CAE54F-5278-425D-A8AE-C5DB7F849C7C}"/>
+              </a:ext>
+            </a:extLst>
+          </p:cNvPr>
+          <p:cNvSpPr txBox="1"/>
+          <p:nvPr/>
+        </p:nvSpPr>
+        <p:spPr>
+          <a:xfrm>
+            <a:off x="136188" y="1997839"/>
+            <a:ext cx="11777370" cy="1477328"/>
+          </a:xfrm>
+          <a:prstGeom prst="rect">
+            <a:avLst/>
+          </a:prstGeom>
+          <a:noFill/>
+        </p:spPr>
+        <p:txBody>
+          <a:bodyPr wrap="square">
+            <a:spAutoFit/>
+          </a:bodyPr>
+          <a:lstStyle/>
+          <a:p>
+            <a:pPr algn="just"/>
+            <a:r>
+              <a:rPr lang="es-MX" dirty="0"/>
+              <a:t>Lenguajes de programación utilizados : HTML 5, CSS, </a:t>
+            </a:r>
+            <a:r>
+              <a:rPr lang="es-MX" dirty="0" err="1"/>
+              <a:t>Js</a:t>
+            </a:r>
+            <a:r>
+              <a:rPr lang="es-MX" dirty="0"/>
+              <a:t> (</a:t>
+            </a:r>
+            <a:r>
+              <a:rPr lang="es-MX" dirty="0" err="1"/>
+              <a:t>javascripts</a:t>
+            </a:r>
+            <a:r>
+              <a:rPr lang="es-MX" dirty="0"/>
+              <a:t>) y Python </a:t>
+            </a:r>
+          </a:p>
+          <a:p>
+            <a:pPr algn="just"/>
+            <a:r>
+              <a:rPr lang="es-MX" sz="1800" dirty="0"/>
+              <a:t>Base de datos en</a:t>
+            </a:r>
+            <a:r>
+              <a:rPr lang="es-MX" dirty="0"/>
+              <a:t>: MySQL</a:t>
+            </a:r>
+          </a:p>
+          <a:p>
+            <a:pPr algn="just"/>
+            <a:r>
+              <a:rPr lang="es-MX" dirty="0"/>
+              <a:t>Framework utilizado: Django</a:t>
+            </a:r>
+          </a:p>
+          <a:p>
+            <a:pPr algn="just"/>
+            <a:r>
+              <a:rPr lang="es-MX" dirty="0"/>
+              <a:t>Repositorio del código y documentación: GitHub</a:t>
+            </a:r>
+          </a:p>
+          <a:p>
+            <a:pPr algn="just"/>
+            <a:r>
+              <a:rPr lang="es-MX" sz="1800" dirty="0"/>
+              <a:t>Aplicación alojada en</a:t>
+            </a:r>
+            <a:r>
+              <a:rPr lang="es-MX" dirty="0"/>
+              <a:t>: </a:t>
+            </a:r>
+            <a:r>
+              <a:rPr lang="es-MX" dirty="0" err="1"/>
+              <a:t>OVHcloud</a:t>
+            </a:r>
+            <a:endParaRPr lang="es-MX" sz="1800" dirty="0"/>
+          </a:p>
+        </p:txBody>
+      </p:sp>
     </p:spTree>
     <p:extLst>
       <p:ext uri="{BB962C8B-B14F-4D97-AF65-F5344CB8AC3E}">
@@ -6982,7 +7091,7 @@
         </p:nvSpPr>
         <p:spPr>
           <a:xfrm>
-            <a:off x="1" y="2707792"/>
+            <a:off x="143435" y="1497557"/>
             <a:ext cx="12191999" cy="1138773"/>
           </a:xfrm>
           <a:prstGeom prst="rect">
@@ -7046,7 +7155,7 @@
         </p:blipFill>
         <p:spPr>
           <a:xfrm>
-            <a:off x="4876800" y="3883130"/>
+            <a:off x="5020235" y="2798400"/>
             <a:ext cx="2438400" cy="2438400"/>
           </a:xfrm>
           <a:prstGeom prst="rect">
@@ -7495,14 +7604,14 @@
           <p:nvPr>
             <p:extLst>
               <p:ext uri="{D42A27DB-BD31-4B8C-83A1-F6EECF244321}">
-                <p14:modId xmlns:p14="http://schemas.microsoft.com/office/powerpoint/2010/main" val="398468133"/>
+                <p14:modId xmlns:p14="http://schemas.microsoft.com/office/powerpoint/2010/main" val="2683149081"/>
               </p:ext>
             </p:extLst>
           </p:nvPr>
         </p:nvGraphicFramePr>
         <p:xfrm>
-          <a:off x="4121026" y="1710819"/>
-          <a:ext cx="7633494" cy="4350554"/>
+          <a:off x="4016188" y="1515038"/>
+          <a:ext cx="7738332" cy="4546335"/>
         </p:xfrm>
         <a:graphic>
           <a:graphicData uri="http://schemas.openxmlformats.org/drawingml/2006/diagram">
@@ -9625,7 +9734,45 @@
                   </a:schemeClr>
                 </a:solidFill>
               </a:rPr>
-              <a:t>PROYECTO “NOMBRE DEL PROYECTO”</a:t>
+              <a:t>PROYECTO  “</a:t>
+            </a:r>
+            <a:r>
+              <a:rPr lang="es-MX" sz="1800" dirty="0"/>
+              <a:t>I</a:t>
+            </a:r>
+            <a:r>
+              <a:rPr lang="es-CL" sz="1800" i="0" dirty="0" err="1">
+                <a:effectLst/>
+              </a:rPr>
+              <a:t>nclushop</a:t>
+            </a:r>
+            <a:r>
+              <a:rPr lang="es-CL" sz="1800" i="0" dirty="0">
+                <a:effectLst/>
+              </a:rPr>
+              <a:t> : Herramientas para un E-</a:t>
+            </a:r>
+            <a:r>
+              <a:rPr lang="es-CL" sz="1800" i="0" dirty="0" err="1">
+                <a:effectLst/>
+              </a:rPr>
+              <a:t>commerce</a:t>
+            </a:r>
+            <a:r>
+              <a:rPr lang="es-CL" sz="1800" i="0" dirty="0">
+                <a:effectLst/>
+              </a:rPr>
+              <a:t> inclusivo</a:t>
+            </a:r>
+            <a:r>
+              <a:rPr lang="es-MX" dirty="0">
+                <a:solidFill>
+                  <a:schemeClr val="bg2">
+                    <a:lumMod val="50000"/>
+                  </a:schemeClr>
+                </a:solidFill>
+              </a:rPr>
+              <a:t>”</a:t>
             </a:r>
           </a:p>
         </p:txBody>
@@ -11809,7 +11956,7 @@
                         </a:spcAft>
                       </a:pPr>
                       <a:r>
-                        <a:rPr lang="es-CL" sz="800" b="1">
+                        <a:rPr lang="es-CL" sz="800" b="1" dirty="0">
                           <a:effectLst/>
                           <a:latin typeface="Calibri" panose="020F0502020204030204" pitchFamily="34" charset="0"/>
                           <a:ea typeface="Calibri" panose="020F0502020204030204" pitchFamily="34" charset="0"/>
@@ -11817,7 +11964,7 @@
                         </a:rPr>
                         <a:t> </a:t>
                       </a:r>
-                      <a:endParaRPr lang="es-CL" sz="1100">
+                      <a:endParaRPr lang="es-CL" sz="1100" dirty="0">
                         <a:effectLst/>
                         <a:latin typeface="Calibri" panose="020F0502020204030204" pitchFamily="34" charset="0"/>
                         <a:ea typeface="Calibri" panose="020F0502020204030204" pitchFamily="34" charset="0"/>
@@ -15964,7 +16111,45 @@
                   </a:schemeClr>
                 </a:solidFill>
               </a:rPr>
-              <a:t>PROYECTO “NOMBRE DEL PROYECTO”</a:t>
+              <a:t>PROYECTO  “</a:t>
+            </a:r>
+            <a:r>
+              <a:rPr lang="es-MX" sz="1800" dirty="0"/>
+              <a:t>I</a:t>
+            </a:r>
+            <a:r>
+              <a:rPr lang="es-CL" sz="1800" i="0" dirty="0" err="1">
+                <a:effectLst/>
+              </a:rPr>
+              <a:t>nclushop</a:t>
+            </a:r>
+            <a:r>
+              <a:rPr lang="es-CL" sz="1800" i="0" dirty="0">
+                <a:effectLst/>
+              </a:rPr>
+              <a:t> : Herramientas para un E-</a:t>
+            </a:r>
+            <a:r>
+              <a:rPr lang="es-CL" sz="1800" i="0" dirty="0" err="1">
+                <a:effectLst/>
+              </a:rPr>
+              <a:t>commerce</a:t>
+            </a:r>
+            <a:r>
+              <a:rPr lang="es-CL" sz="1800" i="0" dirty="0">
+                <a:effectLst/>
+              </a:rPr>
+              <a:t> inclusivo</a:t>
+            </a:r>
+            <a:r>
+              <a:rPr lang="es-MX" dirty="0">
+                <a:solidFill>
+                  <a:schemeClr val="bg2">
+                    <a:lumMod val="50000"/>
+                  </a:schemeClr>
+                </a:solidFill>
+              </a:rPr>
+              <a:t>”</a:t>
             </a:r>
           </a:p>
         </p:txBody>
@@ -16180,7 +16365,7 @@
         </p:nvSpPr>
         <p:spPr>
           <a:xfrm>
-            <a:off x="136188" y="368928"/>
+            <a:off x="1" y="541344"/>
             <a:ext cx="12191999" cy="369332"/>
           </a:xfrm>
           <a:prstGeom prst="rect">
@@ -16202,7 +16387,45 @@
                   </a:schemeClr>
                 </a:solidFill>
               </a:rPr>
-              <a:t>PROYECTO “NOMBRE DEL PROYECTO”</a:t>
+              <a:t>PROYECTO  “</a:t>
+            </a:r>
+            <a:r>
+              <a:rPr lang="es-MX" sz="1800" dirty="0"/>
+              <a:t>I</a:t>
+            </a:r>
+            <a:r>
+              <a:rPr lang="es-CL" sz="1800" i="0" dirty="0" err="1">
+                <a:effectLst/>
+              </a:rPr>
+              <a:t>nclushop</a:t>
+            </a:r>
+            <a:r>
+              <a:rPr lang="es-CL" sz="1800" i="0" dirty="0">
+                <a:effectLst/>
+              </a:rPr>
+              <a:t> : Herramientas para un E-</a:t>
+            </a:r>
+            <a:r>
+              <a:rPr lang="es-CL" sz="1800" i="0" dirty="0" err="1">
+                <a:effectLst/>
+              </a:rPr>
+              <a:t>commerce</a:t>
+            </a:r>
+            <a:r>
+              <a:rPr lang="es-CL" sz="1800" i="0" dirty="0">
+                <a:effectLst/>
+              </a:rPr>
+              <a:t> inclusivo</a:t>
+            </a:r>
+            <a:r>
+              <a:rPr lang="es-MX" dirty="0">
+                <a:solidFill>
+                  <a:schemeClr val="bg2">
+                    <a:lumMod val="50000"/>
+                  </a:schemeClr>
+                </a:solidFill>
+              </a:rPr>
+              <a:t>”</a:t>
             </a:r>
           </a:p>
         </p:txBody>
